--- a/Презентация к проекту по DS.pptx
+++ b/Презентация к проекту по DS.pptx
@@ -19,7 +19,6 @@
     <p:sldId id="266" r:id="rId14"/>
     <p:sldId id="267" r:id="rId15"/>
     <p:sldId id="268" r:id="rId16"/>
-    <p:sldId id="269" r:id="rId17"/>
   </p:sldIdLst>
   <p:sldSz cx="10080625" cy="5670550"/>
   <p:notesSz cx="7559675" cy="10691813"/>
@@ -62,7 +61,7 @@
         <p:spPr>
           <a:xfrm>
             <a:off x="0" y="0"/>
-            <a:ext cx="10079640" cy="5669640"/>
+            <a:ext cx="10079280" cy="5669280"/>
           </a:xfrm>
           <a:prstGeom prst="rect">
             <a:avLst/>
@@ -86,7 +85,7 @@
         <p:spPr>
           <a:xfrm>
             <a:off x="504000" y="28440"/>
-            <a:ext cx="9071640" cy="1341000"/>
+            <a:ext cx="9071280" cy="1341000"/>
           </a:xfrm>
           <a:prstGeom prst="rect">
             <a:avLst/>
@@ -102,6 +101,9 @@
           </a:bodyPr>
           <a:lstStyle>
             <a:lvl1pPr indent="0" algn="l">
+              <a:lnSpc>
+                <a:spcPct val="100000"/>
+              </a:lnSpc>
               <a:buNone/>
               <a:tabLst>
                 <a:tab pos="0" algn="l"/>
@@ -118,6 +120,9 @@
           </a:lstStyle>
           <a:p>
             <a:pPr indent="0" algn="l">
+              <a:lnSpc>
+                <a:spcPct val="100000"/>
+              </a:lnSpc>
               <a:buNone/>
               <a:tabLst>
                 <a:tab pos="0" algn="l"/>
@@ -132,117 +137,7 @@
                 <a:uFillTx/>
                 <a:latin typeface="Arial"/>
               </a:rPr>
-              <a:t>Для </a:t>
-            </a:r>
-            <a:r>
-              <a:rPr lang="ru-RU" sz="4400" b="0" u="none" strike="noStrike">
-                <a:solidFill>
-                  <a:srgbClr val="FFFFFF"/>
-                </a:solidFill>
-                <a:effectLst/>
-                <a:uFillTx/>
-                <a:latin typeface="Arial"/>
-              </a:rPr>
-              <a:t>прав</a:t>
-            </a:r>
-            <a:r>
-              <a:rPr lang="ru-RU" sz="4400" b="0" u="none" strike="noStrike">
-                <a:solidFill>
-                  <a:srgbClr val="FFFFFF"/>
-                </a:solidFill>
-                <a:effectLst/>
-                <a:uFillTx/>
-                <a:latin typeface="Arial"/>
-              </a:rPr>
-              <a:t>ки </a:t>
-            </a:r>
-            <a:r>
-              <a:rPr lang="ru-RU" sz="4400" b="0" u="none" strike="noStrike">
-                <a:solidFill>
-                  <a:srgbClr val="FFFFFF"/>
-                </a:solidFill>
-                <a:effectLst/>
-                <a:uFillTx/>
-                <a:latin typeface="Arial"/>
-              </a:rPr>
-              <a:t>текст</a:t>
-            </a:r>
-            <a:r>
-              <a:rPr lang="ru-RU" sz="4400" b="0" u="none" strike="noStrike">
-                <a:solidFill>
-                  <a:srgbClr val="FFFFFF"/>
-                </a:solidFill>
-                <a:effectLst/>
-                <a:uFillTx/>
-                <a:latin typeface="Arial"/>
-              </a:rPr>
-              <a:t>а </a:t>
-            </a:r>
-            <a:r>
-              <a:rPr lang="ru-RU" sz="4400" b="0" u="none" strike="noStrike">
-                <a:solidFill>
-                  <a:srgbClr val="FFFFFF"/>
-                </a:solidFill>
-                <a:effectLst/>
-                <a:uFillTx/>
-                <a:latin typeface="Arial"/>
-              </a:rPr>
-              <a:t>загл</a:t>
-            </a:r>
-            <a:r>
-              <a:rPr lang="ru-RU" sz="4400" b="0" u="none" strike="noStrike">
-                <a:solidFill>
-                  <a:srgbClr val="FFFFFF"/>
-                </a:solidFill>
-                <a:effectLst/>
-                <a:uFillTx/>
-                <a:latin typeface="Arial"/>
-              </a:rPr>
-              <a:t>авия </a:t>
-            </a:r>
-            <a:r>
-              <a:rPr lang="ru-RU" sz="4400" b="0" u="none" strike="noStrike">
-                <a:solidFill>
-                  <a:srgbClr val="FFFFFF"/>
-                </a:solidFill>
-                <a:effectLst/>
-                <a:uFillTx/>
-                <a:latin typeface="Arial"/>
-              </a:rPr>
-              <a:t>щёлк</a:t>
-            </a:r>
-            <a:r>
-              <a:rPr lang="ru-RU" sz="4400" b="0" u="none" strike="noStrike">
-                <a:solidFill>
-                  <a:srgbClr val="FFFFFF"/>
-                </a:solidFill>
-                <a:effectLst/>
-                <a:uFillTx/>
-                <a:latin typeface="Arial"/>
-              </a:rPr>
-              <a:t>ните </a:t>
-            </a:r>
-            <a:r>
-              <a:rPr lang="ru-RU" sz="4400" b="0" u="none" strike="noStrike">
-                <a:solidFill>
-                  <a:srgbClr val="FFFFFF"/>
-                </a:solidFill>
-                <a:effectLst/>
-                <a:uFillTx/>
-                <a:latin typeface="Arial"/>
-              </a:rPr>
-              <a:t>мыш</a:t>
-            </a:r>
-            <a:r>
-              <a:rPr lang="ru-RU" sz="4400" b="0" u="none" strike="noStrike">
-                <a:solidFill>
-                  <a:srgbClr val="FFFFFF"/>
-                </a:solidFill>
-                <a:effectLst/>
-                <a:uFillTx/>
-                <a:latin typeface="Arial"/>
-              </a:rPr>
-              <a:t>ью</a:t>
+              <a:t>Для правки текста заглавия щёлкните мышью</a:t>
             </a:r>
             <a:endParaRPr lang="ru-RU" sz="4400" b="0" u="none" strike="noStrike">
               <a:solidFill>
@@ -268,7 +163,7 @@
         <p:spPr>
           <a:xfrm>
             <a:off x="504000" y="1326600"/>
-            <a:ext cx="9071640" cy="3287880"/>
+            <a:ext cx="9071280" cy="3287520"/>
           </a:xfrm>
           <a:prstGeom prst="rect">
             <a:avLst/>
@@ -284,6 +179,9 @@
           </a:bodyPr>
           <a:lstStyle>
             <a:lvl1pPr algn="l">
+              <a:lnSpc>
+                <a:spcPct val="100000"/>
+              </a:lnSpc>
               <a:spcBef>
                 <a:spcPts val="1414"/>
               </a:spcBef>
@@ -303,6 +201,9 @@
               </a:defRPr>
             </a:lvl1pPr>
             <a:lvl2pPr lvl="1" algn="l">
+              <a:lnSpc>
+                <a:spcPct val="100000"/>
+              </a:lnSpc>
               <a:spcBef>
                 <a:spcPts val="1134"/>
               </a:spcBef>
@@ -322,6 +223,9 @@
               </a:defRPr>
             </a:lvl2pPr>
             <a:lvl3pPr lvl="2" algn="l">
+              <a:lnSpc>
+                <a:spcPct val="100000"/>
+              </a:lnSpc>
               <a:spcBef>
                 <a:spcPts val="850"/>
               </a:spcBef>
@@ -341,6 +245,9 @@
               </a:defRPr>
             </a:lvl3pPr>
             <a:lvl4pPr lvl="3" algn="l">
+              <a:lnSpc>
+                <a:spcPct val="100000"/>
+              </a:lnSpc>
               <a:spcBef>
                 <a:spcPts val="567"/>
               </a:spcBef>
@@ -360,6 +267,9 @@
               </a:defRPr>
             </a:lvl4pPr>
             <a:lvl5pPr lvl="4" algn="l">
+              <a:lnSpc>
+                <a:spcPct val="100000"/>
+              </a:lnSpc>
               <a:spcBef>
                 <a:spcPts val="283"/>
               </a:spcBef>
@@ -379,6 +289,9 @@
               </a:defRPr>
             </a:lvl5pPr>
             <a:lvl6pPr lvl="5" algn="l">
+              <a:lnSpc>
+                <a:spcPct val="100000"/>
+              </a:lnSpc>
               <a:spcBef>
                 <a:spcPts val="283"/>
               </a:spcBef>
@@ -398,6 +311,9 @@
               </a:defRPr>
             </a:lvl6pPr>
             <a:lvl7pPr lvl="6" algn="l">
+              <a:lnSpc>
+                <a:spcPct val="100000"/>
+              </a:lnSpc>
               <a:spcBef>
                 <a:spcPts val="283"/>
               </a:spcBef>
@@ -418,7 +334,10 @@
             </a:lvl7pPr>
           </a:lstStyle>
           <a:p>
-            <a:pPr indent="-324000" algn="l">
+            <a:pPr marL="432000" indent="-324000" algn="l">
+              <a:lnSpc>
+                <a:spcPct val="100000"/>
+              </a:lnSpc>
               <a:spcBef>
                 <a:spcPts val="1414"/>
               </a:spcBef>
@@ -451,6 +370,9 @@
           </a:p>
           <a:p>
             <a:pPr marL="864000" lvl="1" indent="-324000" algn="l">
+              <a:lnSpc>
+                <a:spcPct val="100000"/>
+              </a:lnSpc>
               <a:spcBef>
                 <a:spcPts val="1134"/>
               </a:spcBef>
@@ -483,6 +405,9 @@
           </a:p>
           <a:p>
             <a:pPr marL="1296000" lvl="2" indent="-288000" algn="l">
+              <a:lnSpc>
+                <a:spcPct val="100000"/>
+              </a:lnSpc>
               <a:spcBef>
                 <a:spcPts val="850"/>
               </a:spcBef>
@@ -515,6 +440,9 @@
           </a:p>
           <a:p>
             <a:pPr marL="1728000" lvl="3" indent="-216000" algn="l">
+              <a:lnSpc>
+                <a:spcPct val="100000"/>
+              </a:lnSpc>
               <a:spcBef>
                 <a:spcPts val="567"/>
               </a:spcBef>
@@ -534,18 +462,7 @@
                 <a:uFillTx/>
                 <a:latin typeface="Arial"/>
               </a:rPr>
-              <a:t>Четвёртый уровень </a:t>
-            </a:r>
-            <a:r>
-              <a:rPr lang="ru-RU" sz="3200" b="0" u="none" strike="noStrike">
-                <a:solidFill>
-                  <a:srgbClr val="FFFFFF"/>
-                </a:solidFill>
-                <a:effectLst/>
-                <a:uFillTx/>
-                <a:latin typeface="Arial"/>
-              </a:rPr>
-              <a:t>структуры</a:t>
+              <a:t>Четвёртый уровень структуры</a:t>
             </a:r>
             <a:endParaRPr lang="ru-RU" sz="3200" b="0" u="none" strike="noStrike">
               <a:solidFill>
@@ -558,6 +475,9 @@
           </a:p>
           <a:p>
             <a:pPr marL="2160000" lvl="4" indent="-216000" algn="l">
+              <a:lnSpc>
+                <a:spcPct val="100000"/>
+              </a:lnSpc>
               <a:spcBef>
                 <a:spcPts val="283"/>
               </a:spcBef>
@@ -577,18 +497,7 @@
                 <a:uFillTx/>
                 <a:latin typeface="Arial"/>
               </a:rPr>
-              <a:t>Пятый уровень </a:t>
-            </a:r>
-            <a:r>
-              <a:rPr lang="ru-RU" sz="3200" b="0" u="none" strike="noStrike">
-                <a:solidFill>
-                  <a:srgbClr val="FFFFFF"/>
-                </a:solidFill>
-                <a:effectLst/>
-                <a:uFillTx/>
-                <a:latin typeface="Arial"/>
-              </a:rPr>
-              <a:t>структуры</a:t>
+              <a:t>Пятый уровень структуры</a:t>
             </a:r>
             <a:endParaRPr lang="ru-RU" sz="3200" b="0" u="none" strike="noStrike">
               <a:solidFill>
@@ -601,6 +510,9 @@
           </a:p>
           <a:p>
             <a:pPr marL="2592000" lvl="5" indent="-216000" algn="l">
+              <a:lnSpc>
+                <a:spcPct val="100000"/>
+              </a:lnSpc>
               <a:spcBef>
                 <a:spcPts val="283"/>
               </a:spcBef>
@@ -620,18 +532,7 @@
                 <a:uFillTx/>
                 <a:latin typeface="Arial"/>
               </a:rPr>
-              <a:t>Шестой уровень </a:t>
-            </a:r>
-            <a:r>
-              <a:rPr lang="ru-RU" sz="3200" b="0" u="none" strike="noStrike">
-                <a:solidFill>
-                  <a:srgbClr val="FFFFFF"/>
-                </a:solidFill>
-                <a:effectLst/>
-                <a:uFillTx/>
-                <a:latin typeface="Arial"/>
-              </a:rPr>
-              <a:t>структуры</a:t>
+              <a:t>Шестой уровень структуры</a:t>
             </a:r>
             <a:endParaRPr lang="ru-RU" sz="3200" b="0" u="none" strike="noStrike">
               <a:solidFill>
@@ -644,6 +545,9 @@
           </a:p>
           <a:p>
             <a:pPr marL="3024000" lvl="6" indent="-216000" algn="l">
+              <a:lnSpc>
+                <a:spcPct val="100000"/>
+              </a:lnSpc>
               <a:spcBef>
                 <a:spcPts val="283"/>
               </a:spcBef>
@@ -663,29 +567,7 @@
                 <a:uFillTx/>
                 <a:latin typeface="Arial"/>
               </a:rPr>
-              <a:t>Седьмой </a:t>
-            </a:r>
-            <a:r>
-              <a:rPr lang="ru-RU" sz="3200" b="0" u="none" strike="noStrike">
-                <a:solidFill>
-                  <a:srgbClr val="FFFFFF"/>
-                </a:solidFill>
-                <a:effectLst/>
-                <a:uFillTx/>
-                <a:latin typeface="Arial"/>
-              </a:rPr>
-              <a:t>уровень </a:t>
-            </a:r>
-            <a:r>
-              <a:rPr lang="ru-RU" sz="3200" b="0" u="none" strike="noStrike">
-                <a:solidFill>
-                  <a:srgbClr val="FFFFFF"/>
-                </a:solidFill>
-                <a:effectLst/>
-                <a:uFillTx/>
-                <a:latin typeface="Arial"/>
-              </a:rPr>
-              <a:t>структуры</a:t>
+              <a:t>Седьмой уровень структуры</a:t>
             </a:r>
             <a:endParaRPr lang="ru-RU" sz="3200" b="0" u="none" strike="noStrike">
               <a:solidFill>
@@ -711,7 +593,7 @@
         <p:spPr>
           <a:xfrm>
             <a:off x="3447360" y="5164920"/>
-            <a:ext cx="3194640" cy="390240"/>
+            <a:ext cx="3194280" cy="389880"/>
           </a:xfrm>
           <a:prstGeom prst="rect">
             <a:avLst/>
@@ -789,7 +671,7 @@
         <p:spPr>
           <a:xfrm>
             <a:off x="7227360" y="5164920"/>
-            <a:ext cx="2347920" cy="390240"/>
+            <a:ext cx="2347560" cy="389880"/>
           </a:xfrm>
           <a:prstGeom prst="rect">
             <a:avLst/>
@@ -832,7 +714,7 @@
                 <a:tab pos="0" algn="l"/>
               </a:tabLst>
             </a:pPr>
-            <a:fld id="{899B54FF-81BC-41DE-A317-DD8200F75ACF}" type="slidenum">
+            <a:fld id="{9A256EA4-BB13-4AAC-A575-3D4947FF92C3}" type="slidenum">
               <a:rPr lang="ru-RU" sz="1400" b="0" u="none" strike="noStrike">
                 <a:solidFill>
                   <a:srgbClr val="FFFFFF"/>
@@ -867,7 +749,7 @@
         <p:spPr>
           <a:xfrm>
             <a:off x="504000" y="5164920"/>
-            <a:ext cx="2347920" cy="390240"/>
+            <a:ext cx="2347560" cy="389880"/>
           </a:xfrm>
           <a:prstGeom prst="rect">
             <a:avLst/>
@@ -883,7 +765,13 @@
           </a:bodyPr>
           <a:lstStyle>
             <a:lvl1pPr indent="0" algn="l">
-              <a:buNone/>
+              <a:lnSpc>
+                <a:spcPct val="100000"/>
+              </a:lnSpc>
+              <a:buNone/>
+              <a:tabLst>
+                <a:tab pos="0" algn="l"/>
+              </a:tabLst>
               <a:defRPr lang="ru-RU" sz="1400" b="0" u="none" strike="noStrike">
                 <a:solidFill>
                   <a:srgbClr val="000000"/>
@@ -896,7 +784,13 @@
           </a:lstStyle>
           <a:p>
             <a:pPr indent="0" algn="l">
-              <a:buNone/>
+              <a:lnSpc>
+                <a:spcPct val="100000"/>
+              </a:lnSpc>
+              <a:buNone/>
+              <a:tabLst>
+                <a:tab pos="0" algn="l"/>
+              </a:tabLst>
             </a:pPr>
             <a:r>
               <a:rPr lang="ru-RU" sz="1400" b="0" u="none" strike="noStrike">
@@ -961,7 +855,7 @@
         <p:spPr>
           <a:xfrm>
             <a:off x="0" y="0"/>
-            <a:ext cx="10079640" cy="5669640"/>
+            <a:ext cx="10079280" cy="5669280"/>
           </a:xfrm>
           <a:prstGeom prst="rect">
             <a:avLst/>
@@ -985,7 +879,7 @@
         <p:spPr>
           <a:xfrm>
             <a:off x="504000" y="28440"/>
-            <a:ext cx="9071640" cy="1341000"/>
+            <a:ext cx="9071280" cy="1341000"/>
           </a:xfrm>
           <a:prstGeom prst="rect">
             <a:avLst/>
@@ -1001,6 +895,9 @@
           </a:bodyPr>
           <a:lstStyle>
             <a:lvl1pPr indent="0" algn="l">
+              <a:lnSpc>
+                <a:spcPct val="100000"/>
+              </a:lnSpc>
               <a:buNone/>
               <a:tabLst>
                 <a:tab pos="0" algn="l"/>
@@ -1017,6 +914,9 @@
           </a:lstStyle>
           <a:p>
             <a:pPr indent="0" algn="l">
+              <a:lnSpc>
+                <a:spcPct val="100000"/>
+              </a:lnSpc>
               <a:buNone/>
               <a:tabLst>
                 <a:tab pos="0" algn="l"/>
@@ -1057,7 +957,7 @@
         <p:spPr>
           <a:xfrm>
             <a:off x="3447360" y="5164920"/>
-            <a:ext cx="3194640" cy="390240"/>
+            <a:ext cx="3194280" cy="389880"/>
           </a:xfrm>
           <a:prstGeom prst="rect">
             <a:avLst/>
@@ -1135,7 +1035,7 @@
         <p:spPr>
           <a:xfrm>
             <a:off x="7227360" y="5164920"/>
-            <a:ext cx="2347920" cy="390240"/>
+            <a:ext cx="2347560" cy="389880"/>
           </a:xfrm>
           <a:prstGeom prst="rect">
             <a:avLst/>
@@ -1178,7 +1078,7 @@
                 <a:tab pos="0" algn="l"/>
               </a:tabLst>
             </a:pPr>
-            <a:fld id="{4A40795C-9F17-4621-94DE-A412CE646D22}" type="slidenum">
+            <a:fld id="{1FDAF80C-6609-454D-A3C9-D994BCF7AD87}" type="slidenum">
               <a:rPr lang="ru-RU" sz="1400" b="0" u="none" strike="noStrike">
                 <a:solidFill>
                   <a:srgbClr val="FFFFFF"/>
@@ -1213,7 +1113,7 @@
         <p:spPr>
           <a:xfrm>
             <a:off x="504000" y="5164920"/>
-            <a:ext cx="2347920" cy="390240"/>
+            <a:ext cx="2347560" cy="389880"/>
           </a:xfrm>
           <a:prstGeom prst="rect">
             <a:avLst/>
@@ -1229,7 +1129,13 @@
           </a:bodyPr>
           <a:lstStyle>
             <a:lvl1pPr indent="0" algn="l">
-              <a:buNone/>
+              <a:lnSpc>
+                <a:spcPct val="100000"/>
+              </a:lnSpc>
+              <a:buNone/>
+              <a:tabLst>
+                <a:tab pos="0" algn="l"/>
+              </a:tabLst>
               <a:defRPr lang="ru-RU" sz="1400" b="0" u="none" strike="noStrike">
                 <a:solidFill>
                   <a:srgbClr val="000000"/>
@@ -1242,7 +1148,13 @@
           </a:lstStyle>
           <a:p>
             <a:pPr indent="0" algn="l">
-              <a:buNone/>
+              <a:lnSpc>
+                <a:spcPct val="100000"/>
+              </a:lnSpc>
+              <a:buNone/>
+              <a:tabLst>
+                <a:tab pos="0" algn="l"/>
+              </a:tabLst>
             </a:pPr>
             <a:r>
               <a:rPr lang="ru-RU" sz="1400" b="0" u="none" strike="noStrike">
@@ -1279,7 +1191,7 @@
         <p:spPr>
           <a:xfrm>
             <a:off x="504000" y="1326600"/>
-            <a:ext cx="9072000" cy="3288600"/>
+            <a:ext cx="9071640" cy="3288240"/>
           </a:xfrm>
           <a:prstGeom prst="rect">
             <a:avLst/>
@@ -1295,6 +1207,9 @@
           </a:bodyPr>
           <a:lstStyle>
             <a:lvl1pPr algn="l">
+              <a:lnSpc>
+                <a:spcPct val="100000"/>
+              </a:lnSpc>
               <a:spcBef>
                 <a:spcPts val="1414"/>
               </a:spcBef>
@@ -1314,6 +1229,9 @@
               </a:defRPr>
             </a:lvl1pPr>
             <a:lvl2pPr lvl="1" algn="l">
+              <a:lnSpc>
+                <a:spcPct val="100000"/>
+              </a:lnSpc>
               <a:spcBef>
                 <a:spcPts val="1134"/>
               </a:spcBef>
@@ -1333,6 +1251,9 @@
               </a:defRPr>
             </a:lvl2pPr>
             <a:lvl3pPr lvl="2" algn="l">
+              <a:lnSpc>
+                <a:spcPct val="100000"/>
+              </a:lnSpc>
               <a:spcBef>
                 <a:spcPts val="850"/>
               </a:spcBef>
@@ -1352,6 +1273,9 @@
               </a:defRPr>
             </a:lvl3pPr>
             <a:lvl4pPr lvl="3" algn="l">
+              <a:lnSpc>
+                <a:spcPct val="100000"/>
+              </a:lnSpc>
               <a:spcBef>
                 <a:spcPts val="567"/>
               </a:spcBef>
@@ -1371,6 +1295,9 @@
               </a:defRPr>
             </a:lvl4pPr>
             <a:lvl5pPr lvl="4" algn="l">
+              <a:lnSpc>
+                <a:spcPct val="100000"/>
+              </a:lnSpc>
               <a:spcBef>
                 <a:spcPts val="283"/>
               </a:spcBef>
@@ -1390,6 +1317,9 @@
               </a:defRPr>
             </a:lvl5pPr>
             <a:lvl6pPr lvl="5" algn="l">
+              <a:lnSpc>
+                <a:spcPct val="100000"/>
+              </a:lnSpc>
               <a:spcBef>
                 <a:spcPts val="283"/>
               </a:spcBef>
@@ -1409,6 +1339,9 @@
               </a:defRPr>
             </a:lvl6pPr>
             <a:lvl7pPr lvl="6" algn="l">
+              <a:lnSpc>
+                <a:spcPct val="100000"/>
+              </a:lnSpc>
               <a:spcBef>
                 <a:spcPts val="283"/>
               </a:spcBef>
@@ -1429,7 +1362,10 @@
             </a:lvl7pPr>
           </a:lstStyle>
           <a:p>
-            <a:pPr indent="-324000" algn="l">
+            <a:pPr marL="432000" indent="-324000" algn="l">
+              <a:lnSpc>
+                <a:spcPct val="100000"/>
+              </a:lnSpc>
               <a:spcBef>
                 <a:spcPts val="1414"/>
               </a:spcBef>
@@ -1462,6 +1398,9 @@
           </a:p>
           <a:p>
             <a:pPr marL="864000" lvl="1" indent="-324000" algn="l">
+              <a:lnSpc>
+                <a:spcPct val="100000"/>
+              </a:lnSpc>
               <a:spcBef>
                 <a:spcPts val="1134"/>
               </a:spcBef>
@@ -1494,6 +1433,9 @@
           </a:p>
           <a:p>
             <a:pPr marL="1296000" lvl="2" indent="-288000" algn="l">
+              <a:lnSpc>
+                <a:spcPct val="100000"/>
+              </a:lnSpc>
               <a:spcBef>
                 <a:spcPts val="850"/>
               </a:spcBef>
@@ -1526,6 +1468,9 @@
           </a:p>
           <a:p>
             <a:pPr marL="1728000" lvl="3" indent="-216000" algn="l">
+              <a:lnSpc>
+                <a:spcPct val="100000"/>
+              </a:lnSpc>
               <a:spcBef>
                 <a:spcPts val="567"/>
               </a:spcBef>
@@ -1558,6 +1503,9 @@
           </a:p>
           <a:p>
             <a:pPr marL="2160000" lvl="4" indent="-216000" algn="l">
+              <a:lnSpc>
+                <a:spcPct val="100000"/>
+              </a:lnSpc>
               <a:spcBef>
                 <a:spcPts val="283"/>
               </a:spcBef>
@@ -1590,6 +1538,9 @@
           </a:p>
           <a:p>
             <a:pPr marL="2592000" lvl="5" indent="-216000" algn="l">
+              <a:lnSpc>
+                <a:spcPct val="100000"/>
+              </a:lnSpc>
               <a:spcBef>
                 <a:spcPts val="283"/>
               </a:spcBef>
@@ -1622,6 +1573,9 @@
           </a:p>
           <a:p>
             <a:pPr marL="3024000" lvl="6" indent="-216000" algn="l">
+              <a:lnSpc>
+                <a:spcPct val="100000"/>
+              </a:lnSpc>
               <a:spcBef>
                 <a:spcPts val="283"/>
               </a:spcBef>
@@ -1689,7 +1643,7 @@
         <p:spPr>
           <a:xfrm>
             <a:off x="504000" y="447120"/>
-            <a:ext cx="9071640" cy="503280"/>
+            <a:ext cx="9071280" cy="503280"/>
           </a:xfrm>
           <a:prstGeom prst="rect">
             <a:avLst/>
@@ -1704,7 +1658,7 @@
             <a:spAutoFit/>
           </a:bodyPr>
           <a:p>
-            <a:pPr indent="0" algn="ctr">
+            <a:pPr indent="0" algn="l">
               <a:buNone/>
               <a:tabLst>
                 <a:tab pos="0" algn="l"/>
@@ -1734,7 +1688,7 @@
         <p:spPr>
           <a:xfrm>
             <a:off x="504000" y="1326600"/>
-            <a:ext cx="9071640" cy="3287880"/>
+            <a:ext cx="9071280" cy="3287520"/>
           </a:xfrm>
           <a:prstGeom prst="rect">
             <a:avLst/>
@@ -1800,7 +1754,7 @@
         <p:txBody>
           <a:bodyPr/>
           <a:p>
-            <a:fld id="{BB701A2F-EB2A-4837-B1F7-17F8762ADEAB}" type="slidenum">
+            <a:fld id="{EF531C78-3225-4F26-8417-2EEDA000AB54}" type="slidenum">
               <a:t>&lt;#&gt;</a:t>
             </a:fld>
           </a:p>
@@ -1895,7 +1849,7 @@
         <p:spPr>
           <a:xfrm>
             <a:off x="0" y="0"/>
-            <a:ext cx="10079640" cy="5669640"/>
+            <a:ext cx="10079280" cy="5669280"/>
           </a:xfrm>
           <a:prstGeom prst="rect">
             <a:avLst/>
@@ -1919,7 +1873,7 @@
         <p:spPr>
           <a:xfrm>
             <a:off x="504000" y="447120"/>
-            <a:ext cx="9071640" cy="503280"/>
+            <a:ext cx="9071280" cy="503280"/>
           </a:xfrm>
           <a:prstGeom prst="rect">
             <a:avLst/>
@@ -1965,95 +1919,7 @@
                 <a:uFillTx/>
                 <a:latin typeface="Arial"/>
               </a:rPr>
-              <a:t>Для </a:t>
-            </a:r>
-            <a:r>
-              <a:rPr lang="ru-RU" sz="3300" b="0" u="none" strike="noStrike">
-                <a:solidFill>
-                  <a:srgbClr val="000000"/>
-                </a:solidFill>
-                <a:effectLst/>
-                <a:uFillTx/>
-                <a:latin typeface="Arial"/>
-              </a:rPr>
-              <a:t>правки </a:t>
-            </a:r>
-            <a:r>
-              <a:rPr lang="ru-RU" sz="3300" b="0" u="none" strike="noStrike">
-                <a:solidFill>
-                  <a:srgbClr val="000000"/>
-                </a:solidFill>
-                <a:effectLst/>
-                <a:uFillTx/>
-                <a:latin typeface="Arial"/>
-              </a:rPr>
-              <a:t>текста </a:t>
-            </a:r>
-            <a:r>
-              <a:rPr lang="ru-RU" sz="3300" b="0" u="none" strike="noStrike">
-                <a:solidFill>
-                  <a:srgbClr val="000000"/>
-                </a:solidFill>
-                <a:effectLst/>
-                <a:uFillTx/>
-                <a:latin typeface="Arial"/>
-              </a:rPr>
-              <a:t>заглав</a:t>
-            </a:r>
-            <a:r>
-              <a:rPr lang="ru-RU" sz="3300" b="0" u="none" strike="noStrike">
-                <a:solidFill>
-                  <a:srgbClr val="000000"/>
-                </a:solidFill>
-                <a:effectLst/>
-                <a:uFillTx/>
-                <a:latin typeface="Arial"/>
-              </a:rPr>
-              <a:t>ия </a:t>
-            </a:r>
-            <a:r>
-              <a:rPr lang="ru-RU" sz="3300" b="0" u="none" strike="noStrike">
-                <a:solidFill>
-                  <a:srgbClr val="000000"/>
-                </a:solidFill>
-                <a:effectLst/>
-                <a:uFillTx/>
-                <a:latin typeface="Arial"/>
-              </a:rPr>
-              <a:t>щёлкн</a:t>
-            </a:r>
-            <a:r>
-              <a:rPr lang="ru-RU" sz="3300" b="0" u="none" strike="noStrike">
-                <a:solidFill>
-                  <a:srgbClr val="000000"/>
-                </a:solidFill>
-                <a:effectLst/>
-                <a:uFillTx/>
-                <a:latin typeface="Arial"/>
-              </a:rPr>
-              <a:t>ите </a:t>
-            </a:r>
-            <a:r>
-              <a:rPr lang="ru-RU" sz="3300" b="0" u="none" strike="noStrike">
-                <a:solidFill>
-                  <a:srgbClr val="000000"/>
-                </a:solidFill>
-                <a:effectLst/>
-                <a:uFillTx/>
-                <a:latin typeface="Arial"/>
-              </a:rPr>
-              <a:t>мышь</a:t>
-            </a:r>
-            <a:r>
-              <a:rPr lang="ru-RU" sz="3300" b="0" u="none" strike="noStrike">
-                <a:solidFill>
-                  <a:srgbClr val="000000"/>
-                </a:solidFill>
-                <a:effectLst/>
-                <a:uFillTx/>
-                <a:latin typeface="Arial"/>
-              </a:rPr>
-              <a:t>ю</a:t>
+              <a:t>Для правки текста заглавия щёлкните мышью</a:t>
             </a:r>
             <a:endParaRPr lang="ru-RU" sz="3300" b="0" u="none" strike="noStrike">
               <a:solidFill>
@@ -2079,7 +1945,7 @@
         <p:spPr>
           <a:xfrm>
             <a:off x="504000" y="1326600"/>
-            <a:ext cx="9071640" cy="3287880"/>
+            <a:ext cx="9071280" cy="3287520"/>
           </a:xfrm>
           <a:prstGeom prst="rect">
             <a:avLst/>
@@ -2467,7 +2333,7 @@
         <p:spPr>
           <a:xfrm>
             <a:off x="3447360" y="5165280"/>
-            <a:ext cx="3194640" cy="390600"/>
+            <a:ext cx="3194280" cy="390240"/>
           </a:xfrm>
           <a:prstGeom prst="rect">
             <a:avLst/>
@@ -2545,7 +2411,7 @@
         <p:spPr>
           <a:xfrm>
             <a:off x="7227360" y="5165280"/>
-            <a:ext cx="2347920" cy="390600"/>
+            <a:ext cx="2347560" cy="390240"/>
           </a:xfrm>
           <a:prstGeom prst="rect">
             <a:avLst/>
@@ -2588,7 +2454,7 @@
                 <a:tab pos="0" algn="l"/>
               </a:tabLst>
             </a:pPr>
-            <a:fld id="{9D152B1F-59E5-4E4A-974B-BC1B14E18BCD}" type="slidenum">
+            <a:fld id="{7A2DBED8-D8CE-4640-B568-E9B336A85ECB}" type="slidenum">
               <a:rPr lang="ru-RU" sz="1400" b="0" u="none" strike="noStrike">
                 <a:solidFill>
                   <a:srgbClr val="000000"/>
@@ -2623,7 +2489,7 @@
         <p:spPr>
           <a:xfrm>
             <a:off x="504000" y="5165280"/>
-            <a:ext cx="2347920" cy="390600"/>
+            <a:ext cx="2347560" cy="390240"/>
           </a:xfrm>
           <a:prstGeom prst="rect">
             <a:avLst/>
@@ -2714,8 +2580,8 @@
         </p:nvSpPr>
         <p:spPr>
           <a:xfrm>
-            <a:off x="504000" y="543960"/>
-            <a:ext cx="9071640" cy="1829160"/>
+            <a:off x="504000" y="543600"/>
+            <a:ext cx="9071280" cy="1829520"/>
           </a:xfrm>
           <a:prstGeom prst="rect">
             <a:avLst/>
@@ -2748,150 +2614,7 @@
                 <a:uFillTx/>
                 <a:latin typeface="Arial"/>
               </a:rPr>
-              <a:t>Финальн</a:t>
-            </a:r>
-            <a:r>
-              <a:rPr lang="ru-RU" sz="2400" b="0" u="none" strike="noStrike">
-                <a:solidFill>
-                  <a:srgbClr val="FFBF00"/>
-                </a:solidFill>
-                <a:effectLst/>
-                <a:uFillTx/>
-                <a:latin typeface="Arial"/>
-              </a:rPr>
-              <a:t>ый </a:t>
-            </a:r>
-            <a:r>
-              <a:rPr lang="ru-RU" sz="2400" b="0" u="none" strike="noStrike">
-                <a:solidFill>
-                  <a:srgbClr val="FFBF00"/>
-                </a:solidFill>
-                <a:effectLst/>
-                <a:uFillTx/>
-                <a:latin typeface="Arial"/>
-              </a:rPr>
-              <a:t>проект: </a:t>
-            </a:r>
-            <a:r>
-              <a:rPr lang="ru-RU" sz="2400" b="0" u="none" strike="noStrike">
-                <a:solidFill>
-                  <a:srgbClr val="FFBF00"/>
-                </a:solidFill>
-                <a:effectLst/>
-                <a:uFillTx/>
-                <a:latin typeface="Arial"/>
-              </a:rPr>
-              <a:t>"Прогноз</a:t>
-            </a:r>
-            <a:r>
-              <a:rPr lang="ru-RU" sz="2400" b="0" u="none" strike="noStrike">
-                <a:solidFill>
-                  <a:srgbClr val="FFBF00"/>
-                </a:solidFill>
-                <a:effectLst/>
-                <a:uFillTx/>
-                <a:latin typeface="Arial"/>
-              </a:rPr>
-              <a:t>ирование </a:t>
-            </a:r>
-            <a:r>
-              <a:rPr lang="ru-RU" sz="2400" b="0" u="none" strike="noStrike">
-                <a:solidFill>
-                  <a:srgbClr val="FFBF00"/>
-                </a:solidFill>
-                <a:effectLst/>
-                <a:uFillTx/>
-                <a:latin typeface="Arial"/>
-              </a:rPr>
-              <a:t>тяжелых </a:t>
-            </a:r>
-            <a:r>
-              <a:rPr lang="ru-RU" sz="2400" b="0" u="none" strike="noStrike">
-                <a:solidFill>
-                  <a:srgbClr val="FFBF00"/>
-                </a:solidFill>
-                <a:effectLst/>
-                <a:uFillTx/>
-                <a:latin typeface="Arial"/>
-              </a:rPr>
-              <a:t>побочны</a:t>
-            </a:r>
-            <a:r>
-              <a:rPr lang="ru-RU" sz="2400" b="0" u="none" strike="noStrike">
-                <a:solidFill>
-                  <a:srgbClr val="FFBF00"/>
-                </a:solidFill>
-                <a:effectLst/>
-                <a:uFillTx/>
-                <a:latin typeface="Arial"/>
-              </a:rPr>
-              <a:t>х </a:t>
-            </a:r>
-            <a:r>
-              <a:rPr lang="ru-RU" sz="2400" b="0" u="none" strike="noStrike">
-                <a:solidFill>
-                  <a:srgbClr val="FFBF00"/>
-                </a:solidFill>
-                <a:effectLst/>
-                <a:uFillTx/>
-                <a:latin typeface="Arial"/>
-              </a:rPr>
-              <a:t>эффекто</a:t>
-            </a:r>
-            <a:r>
-              <a:rPr lang="ru-RU" sz="2400" b="0" u="none" strike="noStrike">
-                <a:solidFill>
-                  <a:srgbClr val="FFBF00"/>
-                </a:solidFill>
-                <a:effectLst/>
-                <a:uFillTx/>
-                <a:latin typeface="Arial"/>
-              </a:rPr>
-              <a:t>в </a:t>
-            </a:r>
-            <a:r>
-              <a:rPr lang="ru-RU" sz="2400" b="0" u="none" strike="noStrike">
-                <a:solidFill>
-                  <a:srgbClr val="FFBF00"/>
-                </a:solidFill>
-                <a:effectLst/>
-                <a:uFillTx/>
-                <a:latin typeface="Arial"/>
-              </a:rPr>
-              <a:t>медицин</a:t>
-            </a:r>
-            <a:r>
-              <a:rPr lang="ru-RU" sz="2400" b="0" u="none" strike="noStrike">
-                <a:solidFill>
-                  <a:srgbClr val="FFBF00"/>
-                </a:solidFill>
-                <a:effectLst/>
-                <a:uFillTx/>
-                <a:latin typeface="Arial"/>
-              </a:rPr>
-              <a:t>ских </a:t>
-            </a:r>
-            <a:r>
-              <a:rPr lang="ru-RU" sz="2400" b="0" u="none" strike="noStrike">
-                <a:solidFill>
-                  <a:srgbClr val="FFBF00"/>
-                </a:solidFill>
-                <a:effectLst/>
-                <a:uFillTx/>
-                <a:latin typeface="Arial"/>
-              </a:rPr>
-              <a:t>препарат</a:t>
-            </a:r>
-            <a:r>
-              <a:rPr lang="ru-RU" sz="2400" b="0" u="none" strike="noStrike">
-                <a:solidFill>
-                  <a:srgbClr val="FFBF00"/>
-                </a:solidFill>
-                <a:effectLst/>
-                <a:uFillTx/>
-                <a:latin typeface="Arial"/>
-              </a:rPr>
-              <a:t>ов "</a:t>
+              <a:t>Финальный проект: "Прогнозирование тяжелых побочных эффектов медицинских препаратов "</a:t>
             </a:r>
             <a:br>
               <a:rPr sz="2400"/>
@@ -2905,161 +2628,7 @@
                 <a:uFillTx/>
                 <a:latin typeface="Arial"/>
               </a:rPr>
-              <a:t>Решение </a:t>
-            </a:r>
-            <a:r>
-              <a:rPr lang="ru-RU" sz="2400" b="0" u="none" strike="noStrike">
-                <a:solidFill>
-                  <a:srgbClr val="FFBF00"/>
-                </a:solidFill>
-                <a:effectLst/>
-                <a:uFillTx/>
-                <a:latin typeface="Arial"/>
-              </a:rPr>
-              <a:t>практиче</a:t>
-            </a:r>
-            <a:r>
-              <a:rPr lang="ru-RU" sz="2400" b="0" u="none" strike="noStrike">
-                <a:solidFill>
-                  <a:srgbClr val="FFBF00"/>
-                </a:solidFill>
-                <a:effectLst/>
-                <a:uFillTx/>
-                <a:latin typeface="Arial"/>
-              </a:rPr>
-              <a:t>ской </a:t>
-            </a:r>
-            <a:r>
-              <a:rPr lang="ru-RU" sz="2400" b="0" u="none" strike="noStrike">
-                <a:solidFill>
-                  <a:srgbClr val="FFBF00"/>
-                </a:solidFill>
-                <a:effectLst/>
-                <a:uFillTx/>
-                <a:latin typeface="Arial"/>
-              </a:rPr>
-              <a:t>бизнес-</a:t>
-            </a:r>
-            <a:r>
-              <a:rPr lang="ru-RU" sz="2400" b="0" u="none" strike="noStrike">
-                <a:solidFill>
-                  <a:srgbClr val="FFBF00"/>
-                </a:solidFill>
-                <a:effectLst/>
-                <a:uFillTx/>
-                <a:latin typeface="Arial"/>
-              </a:rPr>
-              <a:t>задачи в </a:t>
-            </a:r>
-            <a:r>
-              <a:rPr lang="ru-RU" sz="2400" b="0" u="none" strike="noStrike">
-                <a:solidFill>
-                  <a:srgbClr val="FFBF00"/>
-                </a:solidFill>
-                <a:effectLst/>
-                <a:uFillTx/>
-                <a:latin typeface="Arial"/>
-              </a:rPr>
-              <a:t>здравоох</a:t>
-            </a:r>
-            <a:r>
-              <a:rPr lang="ru-RU" sz="2400" b="0" u="none" strike="noStrike">
-                <a:solidFill>
-                  <a:srgbClr val="FFBF00"/>
-                </a:solidFill>
-                <a:effectLst/>
-                <a:uFillTx/>
-                <a:latin typeface="Arial"/>
-              </a:rPr>
-              <a:t>ранении </a:t>
-            </a:r>
-            <a:r>
-              <a:rPr lang="ru-RU" sz="2400" b="0" u="none" strike="noStrike">
-                <a:solidFill>
-                  <a:srgbClr val="FFBF00"/>
-                </a:solidFill>
-                <a:effectLst/>
-                <a:uFillTx/>
-                <a:latin typeface="Arial"/>
-              </a:rPr>
-              <a:t>методам</a:t>
-            </a:r>
-            <a:r>
-              <a:rPr lang="ru-RU" sz="2400" b="0" u="none" strike="noStrike">
-                <a:solidFill>
-                  <a:srgbClr val="FFBF00"/>
-                </a:solidFill>
-                <a:effectLst/>
-                <a:uFillTx/>
-                <a:latin typeface="Arial"/>
-              </a:rPr>
-              <a:t>и Data </a:t>
-            </a:r>
-            <a:r>
-              <a:rPr lang="ru-RU" sz="2400" b="0" u="none" strike="noStrike">
-                <a:solidFill>
-                  <a:srgbClr val="FFBF00"/>
-                </a:solidFill>
-                <a:effectLst/>
-                <a:uFillTx/>
-                <a:latin typeface="Arial"/>
-              </a:rPr>
-              <a:t>Science с </a:t>
-            </a:r>
-            <a:r>
-              <a:rPr lang="ru-RU" sz="2400" b="0" u="none" strike="noStrike">
-                <a:solidFill>
-                  <a:srgbClr val="FFBF00"/>
-                </a:solidFill>
-                <a:effectLst/>
-                <a:uFillTx/>
-                <a:latin typeface="Arial"/>
-              </a:rPr>
-              <a:t>примене</a:t>
-            </a:r>
-            <a:r>
-              <a:rPr lang="ru-RU" sz="2400" b="0" u="none" strike="noStrike">
-                <a:solidFill>
-                  <a:srgbClr val="FFBF00"/>
-                </a:solidFill>
-                <a:effectLst/>
-                <a:uFillTx/>
-                <a:latin typeface="Arial"/>
-              </a:rPr>
-              <a:t>нием </a:t>
-            </a:r>
-            <a:r>
-              <a:rPr lang="ru-RU" sz="2400" b="0" u="none" strike="noStrike">
-                <a:solidFill>
-                  <a:srgbClr val="FFBF00"/>
-                </a:solidFill>
-                <a:effectLst/>
-                <a:uFillTx/>
-                <a:latin typeface="Arial"/>
-              </a:rPr>
-              <a:t>градиент</a:t>
-            </a:r>
-            <a:r>
-              <a:rPr lang="ru-RU" sz="2400" b="0" u="none" strike="noStrike">
-                <a:solidFill>
-                  <a:srgbClr val="FFBF00"/>
-                </a:solidFill>
-                <a:effectLst/>
-                <a:uFillTx/>
-                <a:latin typeface="Arial"/>
-              </a:rPr>
-              <a:t>ного </a:t>
-            </a:r>
-            <a:r>
-              <a:rPr lang="ru-RU" sz="2400" b="0" u="none" strike="noStrike">
-                <a:solidFill>
-                  <a:srgbClr val="FFBF00"/>
-                </a:solidFill>
-                <a:effectLst/>
-                <a:uFillTx/>
-                <a:latin typeface="Arial"/>
-              </a:rPr>
-              <a:t>бустинга</a:t>
+              <a:t>Решение практической бизнес-задачи в здравоохранении методами Data Science с применением градиентного бустинга</a:t>
             </a:r>
             <a:br>
               <a:rPr sz="2400"/>
@@ -3087,8 +2656,8 @@
         </p:nvSpPr>
         <p:spPr>
           <a:xfrm>
-            <a:off x="-540000" y="3419640"/>
-            <a:ext cx="9071640" cy="1620360"/>
+            <a:off x="-540000" y="3419280"/>
+            <a:ext cx="9071280" cy="1620720"/>
           </a:xfrm>
           <a:prstGeom prst="rect">
             <a:avLst/>
@@ -3124,73 +2693,7 @@
                 <a:uFillTx/>
                 <a:latin typeface="Arial"/>
               </a:rPr>
-              <a:t>Автор:Сос</a:t>
-            </a:r>
-            <a:r>
-              <a:rPr lang="ru-RU" sz="2000" b="0" u="none" strike="noStrike">
-                <a:solidFill>
-                  <a:srgbClr val="FFFFFF"/>
-                </a:solidFill>
-                <a:effectLst/>
-                <a:uFillTx/>
-                <a:latin typeface="Arial"/>
-              </a:rPr>
-              <a:t>инович </a:t>
-            </a:r>
-            <a:r>
-              <a:rPr lang="ru-RU" sz="2000" b="0" u="none" strike="noStrike">
-                <a:solidFill>
-                  <a:srgbClr val="FFFFFF"/>
-                </a:solidFill>
-                <a:effectLst/>
-                <a:uFillTx/>
-                <a:latin typeface="Arial"/>
-              </a:rPr>
-              <a:t>Евгений </a:t>
-            </a:r>
-            <a:r>
-              <a:rPr lang="ru-RU" sz="2000" b="0" u="none" strike="noStrike">
-                <a:solidFill>
-                  <a:srgbClr val="FFFFFF"/>
-                </a:solidFill>
-                <a:effectLst/>
-                <a:uFillTx/>
-                <a:latin typeface="Arial"/>
-              </a:rPr>
-              <a:t>Иванович/</a:t>
-            </a:r>
-            <a:r>
-              <a:rPr lang="ru-RU" sz="2000" b="0" u="none" strike="noStrike">
-                <a:solidFill>
-                  <a:srgbClr val="FFFFFF"/>
-                </a:solidFill>
-                <a:effectLst/>
-                <a:uFillTx/>
-                <a:latin typeface="Arial"/>
-              </a:rPr>
-              <a:t>Слушатель </a:t>
-            </a:r>
-            <a:r>
-              <a:rPr lang="ru-RU" sz="2000" b="0" u="none" strike="noStrike">
-                <a:solidFill>
-                  <a:srgbClr val="FFFFFF"/>
-                </a:solidFill>
-                <a:effectLst/>
-                <a:uFillTx/>
-                <a:latin typeface="Arial"/>
-              </a:rPr>
-              <a:t>курса </a:t>
-            </a:r>
-            <a:r>
-              <a:rPr lang="ru-RU" sz="2000" b="0" u="none" strike="noStrike">
-                <a:solidFill>
-                  <a:srgbClr val="FFFFFF"/>
-                </a:solidFill>
-                <a:effectLst/>
-                <a:uFillTx/>
-                <a:latin typeface="Arial"/>
-              </a:rPr>
-              <a:t>BelHard</a:t>
+              <a:t>Автор:Сосинович Евгений Иванович/Слушатель курса BelHard</a:t>
             </a:r>
             <a:br>
               <a:rPr sz="2000"/>
@@ -3259,8 +2762,8 @@
         </p:nvSpPr>
         <p:spPr>
           <a:xfrm>
-            <a:off x="504000" y="447120"/>
-            <a:ext cx="9071640" cy="503280"/>
+            <a:off x="504000" y="446760"/>
+            <a:ext cx="9071280" cy="503640"/>
           </a:xfrm>
           <a:prstGeom prst="rect">
             <a:avLst/>
@@ -3276,6 +2779,9 @@
           </a:bodyPr>
           <a:p>
             <a:pPr indent="0" algn="ctr">
+              <a:lnSpc>
+                <a:spcPct val="100000"/>
+              </a:lnSpc>
               <a:buNone/>
               <a:tabLst>
                 <a:tab pos="0" algn="l"/>
@@ -3290,51 +2796,7 @@
                 <a:uFillTx/>
                 <a:latin typeface="Arial"/>
               </a:rPr>
-              <a:t>Графи</a:t>
-            </a:r>
-            <a:r>
-              <a:rPr lang="ru-RU" sz="3300" b="0" u="none" strike="noStrike">
-                <a:solidFill>
-                  <a:srgbClr val="000000"/>
-                </a:solidFill>
-                <a:effectLst/>
-                <a:uFillTx/>
-                <a:latin typeface="Arial"/>
-              </a:rPr>
-              <a:t>к </a:t>
-            </a:r>
-            <a:r>
-              <a:rPr lang="ru-RU" sz="3300" b="0" u="none" strike="noStrike">
-                <a:solidFill>
-                  <a:srgbClr val="000000"/>
-                </a:solidFill>
-                <a:effectLst/>
-                <a:uFillTx/>
-                <a:latin typeface="Arial"/>
-              </a:rPr>
-              <a:t>сравн</a:t>
-            </a:r>
-            <a:r>
-              <a:rPr lang="ru-RU" sz="3300" b="0" u="none" strike="noStrike">
-                <a:solidFill>
-                  <a:srgbClr val="000000"/>
-                </a:solidFill>
-                <a:effectLst/>
-                <a:uFillTx/>
-                <a:latin typeface="Arial"/>
-              </a:rPr>
-              <a:t>ения </a:t>
-            </a:r>
-            <a:r>
-              <a:rPr lang="ru-RU" sz="3300" b="0" u="none" strike="noStrike">
-                <a:solidFill>
-                  <a:srgbClr val="000000"/>
-                </a:solidFill>
-                <a:effectLst/>
-                <a:uFillTx/>
-                <a:latin typeface="Arial"/>
-              </a:rPr>
-              <a:t>метрик</a:t>
+              <a:t>График сравнения метрик</a:t>
             </a:r>
             <a:endParaRPr lang="ru-RU" sz="3300" b="0" u="none" strike="noStrike">
               <a:solidFill>
@@ -3360,7 +2822,7 @@
         <p:spPr>
           <a:xfrm>
             <a:off x="540000" y="1080000"/>
-            <a:ext cx="8640000" cy="4221720"/>
+            <a:ext cx="8639640" cy="4221360"/>
           </a:xfrm>
           <a:prstGeom prst="rect">
             <a:avLst/>
@@ -3413,8 +2875,8 @@
         </p:nvSpPr>
         <p:spPr>
           <a:xfrm>
-            <a:off x="504000" y="225360"/>
-            <a:ext cx="9071640" cy="947160"/>
+            <a:off x="504000" y="225000"/>
+            <a:ext cx="9071280" cy="947520"/>
           </a:xfrm>
           <a:prstGeom prst="rect">
             <a:avLst/>
@@ -3447,106 +2909,7 @@
                 <a:uFillTx/>
                 <a:latin typeface="Arial"/>
               </a:rPr>
-              <a:t>Анали</a:t>
-            </a:r>
-            <a:r>
-              <a:rPr lang="ru-RU" sz="3300" b="0" u="none" strike="noStrike">
-                <a:solidFill>
-                  <a:srgbClr val="000000"/>
-                </a:solidFill>
-                <a:effectLst/>
-                <a:uFillTx/>
-                <a:latin typeface="Arial"/>
-              </a:rPr>
-              <a:t>з </a:t>
-            </a:r>
-            <a:r>
-              <a:rPr lang="ru-RU" sz="3300" b="0" u="none" strike="noStrike">
-                <a:solidFill>
-                  <a:srgbClr val="000000"/>
-                </a:solidFill>
-                <a:effectLst/>
-                <a:uFillTx/>
-                <a:latin typeface="Arial"/>
-              </a:rPr>
-              <a:t>ошибо</a:t>
-            </a:r>
-            <a:r>
-              <a:rPr lang="ru-RU" sz="3300" b="0" u="none" strike="noStrike">
-                <a:solidFill>
-                  <a:srgbClr val="000000"/>
-                </a:solidFill>
-                <a:effectLst/>
-                <a:uFillTx/>
-                <a:latin typeface="Arial"/>
-              </a:rPr>
-              <a:t>к </a:t>
-            </a:r>
-            <a:r>
-              <a:rPr lang="ru-RU" sz="3300" b="0" u="none" strike="noStrike">
-                <a:solidFill>
-                  <a:srgbClr val="000000"/>
-                </a:solidFill>
-                <a:effectLst/>
-                <a:uFillTx/>
-                <a:latin typeface="Arial"/>
-              </a:rPr>
-              <a:t>лучше</a:t>
-            </a:r>
-            <a:r>
-              <a:rPr lang="ru-RU" sz="3300" b="0" u="none" strike="noStrike">
-                <a:solidFill>
-                  <a:srgbClr val="000000"/>
-                </a:solidFill>
-                <a:effectLst/>
-                <a:uFillTx/>
-                <a:latin typeface="Arial"/>
-              </a:rPr>
-              <a:t>й </a:t>
-            </a:r>
-            <a:r>
-              <a:rPr lang="ru-RU" sz="3300" b="0" u="none" strike="noStrike">
-                <a:solidFill>
-                  <a:srgbClr val="000000"/>
-                </a:solidFill>
-                <a:effectLst/>
-                <a:uFillTx/>
-                <a:latin typeface="Arial"/>
-              </a:rPr>
-              <a:t>модел</a:t>
-            </a:r>
-            <a:r>
-              <a:rPr lang="ru-RU" sz="3300" b="0" u="none" strike="noStrike">
-                <a:solidFill>
-                  <a:srgbClr val="000000"/>
-                </a:solidFill>
-                <a:effectLst/>
-                <a:uFillTx/>
-                <a:latin typeface="Arial"/>
-              </a:rPr>
-              <a:t>и </a:t>
-            </a:r>
-            <a:r>
-              <a:rPr lang="ru-RU" sz="3300" b="0" u="none" strike="noStrike">
-                <a:solidFill>
-                  <a:srgbClr val="000000"/>
-                </a:solidFill>
-                <a:effectLst/>
-                <a:uFillTx/>
-                <a:latin typeface="Arial"/>
-              </a:rPr>
-              <a:t>(Этап </a:t>
-            </a:r>
-            <a:r>
-              <a:rPr lang="ru-RU" sz="3300" b="0" u="none" strike="noStrike">
-                <a:solidFill>
-                  <a:srgbClr val="000000"/>
-                </a:solidFill>
-                <a:effectLst/>
-                <a:uFillTx/>
-                <a:latin typeface="Arial"/>
-              </a:rPr>
-              <a:t>4)</a:t>
+              <a:t>Анализ ошибок лучшей модели (Этап 4)</a:t>
             </a:r>
             <a:endParaRPr lang="ru-RU" sz="3300" b="0" u="none" strike="noStrike">
               <a:solidFill>
@@ -3572,7 +2935,7 @@
         <p:spPr>
           <a:xfrm>
             <a:off x="504000" y="1326600"/>
-            <a:ext cx="4464720" cy="3287880"/>
+            <a:ext cx="4464360" cy="3287520"/>
           </a:xfrm>
           <a:prstGeom prst="rect">
             <a:avLst/>
@@ -3602,7 +2965,7 @@
                 <a:uFillTx/>
                 <a:latin typeface="Arial"/>
               </a:rPr>
-              <a:t>- Матрица ошибок (Confusion Matrix): Благодаря оптимизации гиперпараметров бустинга, ошибки типа False Negative (пропуск опасного состояния) снижены до минимума.</a:t>
+              <a:t>Разбор матрицы ошибок (Тестовая выборка — 300 пациентов):</a:t>
             </a:r>
             <a:endParaRPr lang="ru-RU" sz="2400" b="0" u="none" strike="noStrike">
               <a:solidFill>
@@ -3629,7 +2992,7 @@
                 <a:uFillTx/>
                 <a:latin typeface="Arial"/>
               </a:rPr>
-              <a:t>- Ключевые факторы риска по оценке XGBoost (Feature Importance):</a:t>
+              <a:t> * True Negative (40): Модель точно подтвердила отсутствие рисков для стабильных пациентов.</a:t>
             </a:r>
             <a:endParaRPr lang="ru-RU" sz="2400" b="0" u="none" strike="noStrike">
               <a:solidFill>
@@ -3656,7 +3019,7 @@
                 <a:uFillTx/>
                 <a:latin typeface="Arial"/>
               </a:rPr>
-              <a:t>  1. Количество принимаемых препаратов (`polypharmacy_count`) — самый сильный фактор, перегружающий метаболизм.</a:t>
+              <a:t> * True Positive (169): Модель успешно выявила и спасла от осложнений 169 человек.</a:t>
             </a:r>
             <a:endParaRPr lang="ru-RU" sz="2400" b="0" u="none" strike="noStrike">
               <a:solidFill>
@@ -3683,7 +3046,7 @@
                 <a:uFillTx/>
                 <a:latin typeface="Arial"/>
               </a:rPr>
-              <a:t>  2. Возраст пациента (`age`) — критический маркер снижения скорости выведения лекарств.</a:t>
+              <a:t> * False Negative (Всего 16): Самая опасная ошибка (пропуск риска) снижена до минимума благодаря градиентному бустингу.</a:t>
             </a:r>
             <a:endParaRPr lang="ru-RU" sz="2400" b="0" u="none" strike="noStrike">
               <a:solidFill>
@@ -3710,39 +3073,7 @@
                 <a:uFillTx/>
                 <a:latin typeface="Arial"/>
               </a:rPr>
-              <a:t>  3. Статус артериального давления (`blood_pressure_status`).</a:t>
-            </a:r>
-            <a:endParaRPr lang="ru-RU" sz="2400" b="0" u="none" strike="noStrike">
-              <a:solidFill>
-                <a:srgbClr val="000000"/>
-              </a:solidFill>
-              <a:effectLst/>
-              <a:uFillTx/>
-              <a:latin typeface="Arial"/>
-            </a:endParaRPr>
-          </a:p>
-          <a:p>
-            <a:pPr indent="-324000" algn="l">
-              <a:spcBef>
-                <a:spcPts val="1060"/>
-              </a:spcBef>
-              <a:buClr>
-                <a:srgbClr val="000000"/>
-              </a:buClr>
-              <a:buSzPct val="45000"/>
-              <a:buFont typeface="Wingdings" charset="2"/>
-              <a:buChar char=""/>
-            </a:pPr>
-            <a:r>
-              <a:rPr lang="ru-RU" sz="2400" b="0" u="none" strike="noStrike">
-                <a:solidFill>
-                  <a:srgbClr val="000000"/>
-                </a:solidFill>
-                <a:effectLst/>
-                <a:uFillTx/>
-                <a:latin typeface="Arial"/>
-              </a:rPr>
-              <a:t>  (визуализировано на feature_importance_xgb.png).</a:t>
+              <a:t>Иллюстрация на слайде: Матрица ошибок `confusion_matrix_xgb.png`.</a:t>
             </a:r>
             <a:endParaRPr lang="ru-RU" sz="2400" b="0" u="none" strike="noStrike">
               <a:solidFill>
@@ -3755,6 +3086,30 @@
           </a:p>
         </p:txBody>
       </p:sp>
+      <p:pic>
+        <p:nvPicPr>
+          <p:cNvPr id="45" name=""/>
+          <p:cNvPicPr/>
+          <p:nvPr/>
+        </p:nvPicPr>
+        <p:blipFill>
+          <a:blip r:embed="rId1"/>
+          <a:stretch/>
+        </p:blipFill>
+        <p:spPr>
+          <a:xfrm>
+            <a:off x="5040000" y="1620000"/>
+            <a:ext cx="4320000" cy="3600000"/>
+          </a:xfrm>
+          <a:prstGeom prst="rect">
+            <a:avLst/>
+          </a:prstGeom>
+          <a:noFill/>
+          <a:ln w="0">
+            <a:noFill/>
+          </a:ln>
+        </p:spPr>
+      </p:pic>
     </p:spTree>
   </p:cSld>
   <mc:AlternateContent>
@@ -3787,7 +3142,7 @@
       </p:grpSpPr>
       <p:sp>
         <p:nvSpPr>
-          <p:cNvPr id="45" name="PlaceHolder 1"/>
+          <p:cNvPr id="46" name="PlaceHolder 1"/>
           <p:cNvSpPr>
             <a:spLocks noGrp="1"/>
           </p:cNvSpPr>
@@ -3797,8 +3152,8 @@
         </p:nvSpPr>
         <p:spPr>
           <a:xfrm>
-            <a:off x="504000" y="225360"/>
-            <a:ext cx="9071640" cy="947160"/>
+            <a:off x="504000" y="225000"/>
+            <a:ext cx="9071280" cy="947520"/>
           </a:xfrm>
           <a:prstGeom prst="rect">
             <a:avLst/>
@@ -3846,7 +3201,7 @@
       </p:sp>
       <p:sp>
         <p:nvSpPr>
-          <p:cNvPr id="46" name="PlaceHolder 2"/>
+          <p:cNvPr id="47" name="PlaceHolder 2"/>
           <p:cNvSpPr>
             <a:spLocks noGrp="1"/>
           </p:cNvSpPr>
@@ -3857,7 +3212,7 @@
         <p:spPr>
           <a:xfrm>
             <a:off x="504000" y="1326600"/>
-            <a:ext cx="3815640" cy="3893040"/>
+            <a:ext cx="3815280" cy="3892680"/>
           </a:xfrm>
           <a:prstGeom prst="rect">
             <a:avLst/>
@@ -3959,7 +3314,7 @@
                 <a:uFillTx/>
                 <a:latin typeface="Arial"/>
               </a:rPr>
-              <a:t>2.Возраст(Age): С возрастом снижается скорость выведения препаратов.</a:t>
+              <a:t>2. Класс препарата (Drug Class - Anticoagulant): Назначение антикоагулянтов в сочетании со старшим возрастом резко повышает риск тяжелых осложнений (кровотечений).</a:t>
             </a:r>
             <a:endParaRPr lang="ru-RU" sz="2400" b="0" u="none" strike="noStrike">
               <a:solidFill>
@@ -3992,7 +3347,7 @@
                 <a:uFillTx/>
                 <a:latin typeface="Arial"/>
               </a:rPr>
-              <a:t>3. Класс препарата (Drug Class - Anticoagulant): Назначение антикоагулянтов в сочетании со старшим возрастом резко повышает риск тяжелых осложнений (кровотечений).</a:t>
+              <a:t>3.blood_pressure_status_Normal (Статус АД) — важный соматический маркер.</a:t>
             </a:r>
             <a:endParaRPr lang="ru-RU" sz="2400" b="0" u="none" strike="noStrike">
               <a:solidFill>
@@ -4007,7 +3362,7 @@
       </p:sp>
       <p:pic>
         <p:nvPicPr>
-          <p:cNvPr id="47" name=""/>
+          <p:cNvPr id="48" name=""/>
           <p:cNvPicPr/>
           <p:nvPr/>
         </p:nvPicPr>
@@ -4017,14 +3372,14 @@
         </p:blipFill>
         <p:spPr>
           <a:xfrm>
-            <a:off x="4500000" y="1452240"/>
-            <a:ext cx="5039640" cy="3767400"/>
+            <a:off x="4320000" y="1506600"/>
+            <a:ext cx="5400000" cy="3713400"/>
           </a:xfrm>
           <a:prstGeom prst="rect">
             <a:avLst/>
           </a:prstGeom>
           <a:noFill/>
-          <a:ln w="18000">
+          <a:ln w="0">
             <a:noFill/>
           </a:ln>
         </p:spPr>
@@ -4061,7 +3416,7 @@
       </p:grpSpPr>
       <p:sp>
         <p:nvSpPr>
-          <p:cNvPr id="48" name="PlaceHolder 1"/>
+          <p:cNvPr id="49" name="PlaceHolder 1"/>
           <p:cNvSpPr>
             <a:spLocks noGrp="1"/>
           </p:cNvSpPr>
@@ -4071,8 +3426,8 @@
         </p:nvSpPr>
         <p:spPr>
           <a:xfrm>
-            <a:off x="504000" y="225360"/>
-            <a:ext cx="9071640" cy="947160"/>
+            <a:off x="504000" y="225000"/>
+            <a:ext cx="9071280" cy="947520"/>
           </a:xfrm>
           <a:prstGeom prst="rect">
             <a:avLst/>
@@ -4120,7 +3475,7 @@
       </p:sp>
       <p:sp>
         <p:nvSpPr>
-          <p:cNvPr id="49" name="PlaceHolder 2"/>
+          <p:cNvPr id="50" name="PlaceHolder 2"/>
           <p:cNvSpPr>
             <a:spLocks noGrp="1"/>
           </p:cNvSpPr>
@@ -4131,7 +3486,7 @@
         <p:spPr>
           <a:xfrm>
             <a:off x="504000" y="1326600"/>
-            <a:ext cx="9071640" cy="3287880"/>
+            <a:ext cx="9071280" cy="3287520"/>
           </a:xfrm>
           <a:prstGeom prst="rect">
             <a:avLst/>
@@ -4143,7 +3498,7 @@
         </p:spPr>
         <p:txBody>
           <a:bodyPr lIns="0" tIns="0" rIns="0" bIns="0" anchor="t">
-            <a:normAutofit fontScale="85000" lnSpcReduction="9999"/>
+            <a:normAutofit fontScale="92500" lnSpcReduction="9999"/>
           </a:bodyPr>
           <a:p>
             <a:pPr marL="432000" indent="0" algn="l">
@@ -4167,7 +3522,62 @@
                 <a:uFillTx/>
                 <a:latin typeface="Arial"/>
               </a:rPr>
-              <a:t>Интеграция: Модель упаковывается в микросервис и интегрируется в медицинскую информационную систему (МИС) как модуль поддержки принятия врачебных решений (CDSS).</a:t>
+              <a:t>Интеграция: Модель упаковывается в </a:t>
+            </a:r>
+            <a:r>
+              <a:rPr lang="ru-RU" sz="2400" b="0" u="none" strike="noStrike">
+                <a:solidFill>
+                  <a:srgbClr val="000000"/>
+                </a:solidFill>
+                <a:effectLst/>
+                <a:uFillTx/>
+                <a:latin typeface="Arial"/>
+              </a:rPr>
+              <a:t>готовый пайплайн и внедряется в </a:t>
+            </a:r>
+            <a:r>
+              <a:rPr lang="ru-RU" sz="2400" b="0" u="none" strike="noStrike">
+                <a:solidFill>
+                  <a:srgbClr val="000000"/>
+                </a:solidFill>
+                <a:effectLst/>
+                <a:uFillTx/>
+                <a:latin typeface="Arial"/>
+              </a:rPr>
+              <a:t>Медицинские Информационные </a:t>
+            </a:r>
+            <a:r>
+              <a:rPr lang="ru-RU" sz="2400" b="0" u="none" strike="noStrike">
+                <a:solidFill>
+                  <a:srgbClr val="000000"/>
+                </a:solidFill>
+                <a:effectLst/>
+                <a:uFillTx/>
+                <a:latin typeface="Arial"/>
+              </a:rPr>
+              <a:t>Системы (МИС) как модуль </a:t>
+            </a:r>
+            <a:r>
+              <a:rPr lang="ru-RU" sz="2400" b="0" u="none" strike="noStrike">
+                <a:solidFill>
+                  <a:srgbClr val="000000"/>
+                </a:solidFill>
+                <a:effectLst/>
+                <a:uFillTx/>
+                <a:latin typeface="Arial"/>
+              </a:rPr>
+              <a:t>интеллектуальной поддержки </a:t>
+            </a:r>
+            <a:r>
+              <a:rPr lang="ru-RU" sz="2400" b="0" u="none" strike="noStrike">
+                <a:solidFill>
+                  <a:srgbClr val="000000"/>
+                </a:solidFill>
+                <a:effectLst/>
+                <a:uFillTx/>
+                <a:latin typeface="Arial"/>
+              </a:rPr>
+              <a:t>(CDSS).</a:t>
             </a:r>
             <a:endParaRPr lang="ru-RU" sz="2400" b="0" u="none" strike="noStrike">
               <a:solidFill>
@@ -4200,7 +3610,73 @@
                 <a:uFillTx/>
                 <a:latin typeface="Arial"/>
               </a:rPr>
-              <a:t>Сценарий работы: Врач кликает «Сохранить рецепт» -&gt; Модель проверяет карту -&gt; Если риск &gt; 75%, всплывает окно-предупреждение: «Внимание: у пациента высокий риск тяжелой побочной реакции из-за комбинации лекарств и возраста. Рекомендуется пересмотреть дозировку».</a:t>
+              <a:t>Сценарий: При клике врача </a:t>
+            </a:r>
+            <a:r>
+              <a:rPr lang="ru-RU" sz="2400" b="0" u="none" strike="noStrike">
+                <a:solidFill>
+                  <a:srgbClr val="000000"/>
+                </a:solidFill>
+                <a:effectLst/>
+                <a:uFillTx/>
+                <a:latin typeface="Arial"/>
+              </a:rPr>
+              <a:t>«Сохранить рецепт» модель </a:t>
+            </a:r>
+            <a:r>
+              <a:rPr lang="ru-RU" sz="2400" b="0" u="none" strike="noStrike">
+                <a:solidFill>
+                  <a:srgbClr val="000000"/>
+                </a:solidFill>
+                <a:effectLst/>
+                <a:uFillTx/>
+                <a:latin typeface="Arial"/>
+              </a:rPr>
+              <a:t>мгновенно оценивает карту. При </a:t>
+            </a:r>
+            <a:r>
+              <a:rPr lang="ru-RU" sz="2400" b="0" u="none" strike="noStrike">
+                <a:solidFill>
+                  <a:srgbClr val="000000"/>
+                </a:solidFill>
+                <a:effectLst/>
+                <a:uFillTx/>
+                <a:latin typeface="Arial"/>
+              </a:rPr>
+              <a:t>риске &gt; 75% выводится окно: </a:t>
+            </a:r>
+            <a:r>
+              <a:rPr lang="ru-RU" sz="2400" b="0" u="none" strike="noStrike">
+                <a:solidFill>
+                  <a:srgbClr val="000000"/>
+                </a:solidFill>
+                <a:effectLst/>
+                <a:uFillTx/>
+                <a:latin typeface="Arial"/>
+              </a:rPr>
+              <a:t>«Внимание: высокий риск тяжелой </a:t>
+            </a:r>
+            <a:r>
+              <a:rPr lang="ru-RU" sz="2400" b="0" u="none" strike="noStrike">
+                <a:solidFill>
+                  <a:srgbClr val="000000"/>
+                </a:solidFill>
+                <a:effectLst/>
+                <a:uFillTx/>
+                <a:latin typeface="Arial"/>
+              </a:rPr>
+              <a:t>реакции! Критическое сочетание </a:t>
+            </a:r>
+            <a:r>
+              <a:rPr lang="ru-RU" sz="2400" b="0" u="none" strike="noStrike">
+                <a:solidFill>
+                  <a:srgbClr val="000000"/>
+                </a:solidFill>
+                <a:effectLst/>
+                <a:uFillTx/>
+                <a:latin typeface="Arial"/>
+              </a:rPr>
+              <a:t>возраста и полипрагмазии».</a:t>
             </a:r>
             <a:endParaRPr lang="ru-RU" sz="2400" b="0" u="none" strike="noStrike">
               <a:solidFill>
@@ -4233,7 +3709,51 @@
                 <a:uFillTx/>
                 <a:latin typeface="Arial"/>
               </a:rPr>
-              <a:t>Экономический эффект: Снижение частоты тяжелых побочных эффектов на 20-25%, сокращение расходов клиники на реанимацию и повторное лечение, защита здоровья граждан.</a:t>
+              <a:t>Ожидаемый эффект: Снижение </a:t>
+            </a:r>
+            <a:r>
+              <a:rPr lang="ru-RU" sz="2400" b="0" u="none" strike="noStrike">
+                <a:solidFill>
+                  <a:srgbClr val="000000"/>
+                </a:solidFill>
+                <a:effectLst/>
+                <a:uFillTx/>
+                <a:latin typeface="Arial"/>
+              </a:rPr>
+              <a:t>частоты тяжелых осложнений на 20-</a:t>
+            </a:r>
+            <a:r>
+              <a:rPr lang="ru-RU" sz="2400" b="0" u="none" strike="noStrike">
+                <a:solidFill>
+                  <a:srgbClr val="000000"/>
+                </a:solidFill>
+                <a:effectLst/>
+                <a:uFillTx/>
+                <a:latin typeface="Arial"/>
+              </a:rPr>
+              <a:t>25%, минимизация затрат на </a:t>
+            </a:r>
+            <a:r>
+              <a:rPr lang="ru-RU" sz="2400" b="0" u="none" strike="noStrike">
+                <a:solidFill>
+                  <a:srgbClr val="000000"/>
+                </a:solidFill>
+                <a:effectLst/>
+                <a:uFillTx/>
+                <a:latin typeface="Arial"/>
+              </a:rPr>
+              <a:t>реанимацию и защита здоровья </a:t>
+            </a:r>
+            <a:r>
+              <a:rPr lang="ru-RU" sz="2400" b="0" u="none" strike="noStrike">
+                <a:solidFill>
+                  <a:srgbClr val="000000"/>
+                </a:solidFill>
+                <a:effectLst/>
+                <a:uFillTx/>
+                <a:latin typeface="Arial"/>
+              </a:rPr>
+              <a:t>граждан.</a:t>
             </a:r>
             <a:endParaRPr lang="ru-RU" sz="2400" b="0" u="none" strike="noStrike">
               <a:solidFill>
@@ -4244,124 +3764,6 @@
               <a:latin typeface="Arial"/>
             </a:endParaRPr>
           </a:p>
-        </p:txBody>
-      </p:sp>
-    </p:spTree>
-  </p:cSld>
-  <mc:AlternateContent>
-    <mc:Choice Requires="p14">
-      <p:transition spd="slow" p14:dur="2000"/>
-    </mc:Choice>
-    <mc:Fallback>
-      <p:transition spd="slow"/>
-    </mc:Fallback>
-  </mc:AlternateContent>
-</p:sld>
-</file>
-
-<file path=ppt/slides/slide14.xml><?xml version="1.0" encoding="utf-8"?>
-<p:sld xmlns:a="http://schemas.openxmlformats.org/drawingml/2006/main" xmlns:p="http://schemas.openxmlformats.org/presentationml/2006/main" xmlns:r="http://schemas.openxmlformats.org/officeDocument/2006/relationships" xmlns:p14="http://schemas.microsoft.com/office/powerpoint/2010/main" xmlns:p15="http://schemas.microsoft.com/office/powerpoint/2012/main" xmlns:mc="http://schemas.openxmlformats.org/markup-compatibility/2006">
-  <p:cSld>
-    <p:spTree>
-      <p:nvGrpSpPr>
-        <p:cNvPr id="1" name=""/>
-        <p:cNvGrpSpPr/>
-        <p:nvPr/>
-      </p:nvGrpSpPr>
-      <p:grpSpPr>
-        <a:xfrm>
-          <a:off x="0" y="0"/>
-          <a:ext cx="0" cy="0"/>
-          <a:chOff x="0" y="0"/>
-          <a:chExt cx="0" cy="0"/>
-        </a:xfrm>
-      </p:grpSpPr>
-      <p:sp>
-        <p:nvSpPr>
-          <p:cNvPr id="50" name="PlaceHolder 1"/>
-          <p:cNvSpPr>
-            <a:spLocks noGrp="1"/>
-          </p:cNvSpPr>
-          <p:nvPr>
-            <p:ph type="title"/>
-          </p:nvPr>
-        </p:nvSpPr>
-        <p:spPr>
-          <a:xfrm>
-            <a:off x="504000" y="225360"/>
-            <a:ext cx="9071640" cy="947160"/>
-          </a:xfrm>
-          <a:prstGeom prst="rect">
-            <a:avLst/>
-          </a:prstGeom>
-          <a:noFill/>
-          <a:ln w="0">
-            <a:noFill/>
-          </a:ln>
-        </p:spPr>
-        <p:txBody>
-          <a:bodyPr lIns="0" tIns="0" rIns="0" bIns="0" anchor="ctr">
-            <a:spAutoFit/>
-          </a:bodyPr>
-          <a:p>
-            <a:pPr indent="0" algn="ctr">
-              <a:lnSpc>
-                <a:spcPct val="100000"/>
-              </a:lnSpc>
-              <a:buNone/>
-              <a:tabLst>
-                <a:tab pos="0" algn="l"/>
-              </a:tabLst>
-            </a:pPr>
-            <a:r>
-              <a:rPr lang="ru-RU" sz="3300" b="0" u="none" strike="noStrike">
-                <a:solidFill>
-                  <a:srgbClr val="000000"/>
-                </a:solidFill>
-                <a:effectLst/>
-                <a:uFillTx/>
-                <a:latin typeface="Arial"/>
-              </a:rPr>
-              <a:t>Дальнейшие шаги и развитие проекта</a:t>
-            </a:r>
-            <a:endParaRPr lang="ru-RU" sz="3300" b="0" u="none" strike="noStrike">
-              <a:solidFill>
-                <a:srgbClr val="000000"/>
-              </a:solidFill>
-              <a:effectLst/>
-              <a:uFillTx/>
-              <a:latin typeface="Arial"/>
-            </a:endParaRPr>
-          </a:p>
-        </p:txBody>
-      </p:sp>
-      <p:sp>
-        <p:nvSpPr>
-          <p:cNvPr id="51" name="PlaceHolder 2"/>
-          <p:cNvSpPr>
-            <a:spLocks noGrp="1"/>
-          </p:cNvSpPr>
-          <p:nvPr>
-            <p:ph/>
-          </p:nvPr>
-        </p:nvSpPr>
-        <p:spPr>
-          <a:xfrm>
-            <a:off x="504000" y="1326600"/>
-            <a:ext cx="9071640" cy="3287880"/>
-          </a:xfrm>
-          <a:prstGeom prst="rect">
-            <a:avLst/>
-          </a:prstGeom>
-          <a:noFill/>
-          <a:ln w="0">
-            <a:noFill/>
-          </a:ln>
-        </p:spPr>
-        <p:txBody>
-          <a:bodyPr lIns="0" tIns="0" rIns="0" bIns="0" anchor="t">
-            <a:normAutofit fontScale="85000" lnSpcReduction="9999"/>
-          </a:bodyPr>
           <a:p>
             <a:pPr marL="432000" indent="0" algn="l">
               <a:lnSpc>
@@ -4375,83 +3777,6 @@
                 <a:tab pos="0" algn="l"/>
               </a:tabLst>
             </a:pPr>
-            <a:r>
-              <a:rPr lang="ru-RU" sz="2400" b="0" u="none" strike="noStrike">
-                <a:solidFill>
-                  <a:srgbClr val="000000"/>
-                </a:solidFill>
-                <a:effectLst/>
-                <a:uFillTx/>
-                <a:latin typeface="Arial"/>
-              </a:rPr>
-              <a:t>1. Обогащение данных: Подключение данных о генетических маркерах пациентов и биохимических показателях крови (креатинин, АЛТ/АСТ) для более глубокого анализа метаболизма лекарств.</a:t>
-            </a:r>
-            <a:endParaRPr lang="ru-RU" sz="2400" b="0" u="none" strike="noStrike">
-              <a:solidFill>
-                <a:srgbClr val="000000"/>
-              </a:solidFill>
-              <a:effectLst/>
-              <a:uFillTx/>
-              <a:latin typeface="Arial"/>
-            </a:endParaRPr>
-          </a:p>
-          <a:p>
-            <a:pPr marL="432000" indent="0" algn="l">
-              <a:lnSpc>
-                <a:spcPct val="100000"/>
-              </a:lnSpc>
-              <a:spcBef>
-                <a:spcPts val="1060"/>
-              </a:spcBef>
-              <a:buNone/>
-              <a:tabLst>
-                <a:tab pos="0" algn="l"/>
-              </a:tabLst>
-            </a:pPr>
-            <a:r>
-              <a:rPr lang="ru-RU" sz="2400" b="0" u="none" strike="noStrike">
-                <a:solidFill>
-                  <a:srgbClr val="000000"/>
-                </a:solidFill>
-                <a:effectLst/>
-                <a:uFillTx/>
-                <a:latin typeface="Arial"/>
-              </a:rPr>
-              <a:t>2. Усложнение архитектуры: Использование градиентного бустинга (XGBoost, CatBoost) и построение нейросети (Многослойный Перцептрон) для поиска скрытых медицинских паттернов.</a:t>
-            </a:r>
-            <a:endParaRPr lang="ru-RU" sz="2400" b="0" u="none" strike="noStrike">
-              <a:solidFill>
-                <a:srgbClr val="000000"/>
-              </a:solidFill>
-              <a:effectLst/>
-              <a:uFillTx/>
-              <a:latin typeface="Arial"/>
-            </a:endParaRPr>
-          </a:p>
-          <a:p>
-            <a:pPr marL="432000" indent="0" algn="l">
-              <a:lnSpc>
-                <a:spcPct val="100000"/>
-              </a:lnSpc>
-              <a:spcBef>
-                <a:spcPts val="1060"/>
-              </a:spcBef>
-              <a:buNone/>
-              <a:tabLst>
-                <a:tab pos="0" algn="l"/>
-              </a:tabLst>
-            </a:pPr>
-            <a:r>
-              <a:rPr lang="ru-RU" sz="2400" b="0" u="none" strike="noStrike">
-                <a:solidFill>
-                  <a:srgbClr val="000000"/>
-                </a:solidFill>
-                <a:effectLst/>
-                <a:uFillTx/>
-                <a:latin typeface="Arial"/>
-              </a:rPr>
-              <a:t>3. NLP-модуль: Обучение моделей-трансформеров (BERT) для парсинга неструктурированных текстовых заметок врачей из истории болезни с целью извлечения скрытых жалоб.</a:t>
-            </a:r>
             <a:endParaRPr lang="ru-RU" sz="2400" b="0" u="none" strike="noStrike">
               <a:solidFill>
                 <a:srgbClr val="000000"/>
@@ -4505,8 +3830,8 @@
         </p:nvSpPr>
         <p:spPr>
           <a:xfrm>
-            <a:off x="504000" y="225360"/>
-            <a:ext cx="9071640" cy="947160"/>
+            <a:off x="504000" y="225000"/>
+            <a:ext cx="9071280" cy="947520"/>
           </a:xfrm>
           <a:prstGeom prst="rect">
             <a:avLst/>
@@ -4565,7 +3890,7 @@
         <p:spPr>
           <a:xfrm>
             <a:off x="504000" y="1326600"/>
-            <a:ext cx="9071640" cy="3287880"/>
+            <a:ext cx="9071280" cy="3287520"/>
           </a:xfrm>
           <a:prstGeom prst="rect">
             <a:avLst/>
@@ -4711,8 +4036,8 @@
         </p:nvSpPr>
         <p:spPr>
           <a:xfrm>
-            <a:off x="504000" y="225360"/>
-            <a:ext cx="9071640" cy="947160"/>
+            <a:off x="504000" y="225000"/>
+            <a:ext cx="9071280" cy="947520"/>
           </a:xfrm>
           <a:prstGeom prst="rect">
             <a:avLst/>
@@ -4771,7 +4096,7 @@
         <p:spPr>
           <a:xfrm>
             <a:off x="504000" y="1326600"/>
-            <a:ext cx="9071640" cy="3287880"/>
+            <a:ext cx="9071280" cy="3287520"/>
           </a:xfrm>
           <a:prstGeom prst="rect">
             <a:avLst/>
@@ -4906,7 +4231,7 @@
                 <a:uFillTx/>
                 <a:latin typeface="Arial"/>
               </a:rPr>
-              <a:t>Целевая бизнес-метрика: Recall (Полнота) и F1-Score.</a:t>
+              <a:t>Ключевая бизнес-метрика: Recall (Полнота) </a:t>
             </a:r>
             <a:endParaRPr lang="ru-RU" sz="2400" b="0" u="none" strike="noStrike">
               <a:solidFill>
@@ -4939,7 +4264,7 @@
                 <a:uFillTx/>
                 <a:latin typeface="Arial"/>
               </a:rPr>
-              <a:t>Почему Recall? В медицине критически опасно пропустить пациента с риском (Ложноотрицательный ответ). Лучше перестраховать врача, чем допустить тяжелое осложнение. Порог ROC-AUC также используется для общей оценки разделяющей способности модели.</a:t>
+              <a:t>Почему Recall? В медицине критически опасно пропустить пациента с риском (ошибка False Negative). Лучше перестраховать врача, чем допустить тяжелое осложнение.Модель должна максимизировать обнаружение опасных состояний. Вспомогательные метрики: F1-Score (баланс) и ROC-AUC (общая разделительная способность).</a:t>
             </a:r>
             <a:endParaRPr lang="ru-RU" sz="2400" b="0" u="none" strike="noStrike">
               <a:solidFill>
@@ -4994,8 +4319,8 @@
         </p:nvSpPr>
         <p:spPr>
           <a:xfrm>
-            <a:off x="504000" y="225360"/>
-            <a:ext cx="9071640" cy="947160"/>
+            <a:off x="504000" y="225000"/>
+            <a:ext cx="9071280" cy="947520"/>
           </a:xfrm>
           <a:prstGeom prst="rect">
             <a:avLst/>
@@ -5054,7 +4379,7 @@
         <p:spPr>
           <a:xfrm>
             <a:off x="504000" y="1326600"/>
-            <a:ext cx="9071640" cy="3533040"/>
+            <a:ext cx="9071280" cy="3532680"/>
           </a:xfrm>
           <a:prstGeom prst="rect">
             <a:avLst/>
@@ -5387,8 +4712,8 @@
         </p:nvSpPr>
         <p:spPr>
           <a:xfrm>
-            <a:off x="504000" y="225360"/>
-            <a:ext cx="9071640" cy="947160"/>
+            <a:off x="504000" y="225000"/>
+            <a:ext cx="9071280" cy="947520"/>
           </a:xfrm>
           <a:prstGeom prst="rect">
             <a:avLst/>
@@ -5421,84 +4746,7 @@
                 <a:uFillTx/>
                 <a:latin typeface="Arial"/>
               </a:rPr>
-              <a:t>Резуль</a:t>
-            </a:r>
-            <a:r>
-              <a:rPr lang="ru-RU" sz="3300" b="0" u="none" strike="noStrike">
-                <a:solidFill>
-                  <a:srgbClr val="000000"/>
-                </a:solidFill>
-                <a:effectLst/>
-                <a:uFillTx/>
-                <a:latin typeface="Arial"/>
-              </a:rPr>
-              <a:t>таты </a:t>
-            </a:r>
-            <a:r>
-              <a:rPr lang="ru-RU" sz="3300" b="0" u="none" strike="noStrike">
-                <a:solidFill>
-                  <a:srgbClr val="000000"/>
-                </a:solidFill>
-                <a:effectLst/>
-                <a:uFillTx/>
-                <a:latin typeface="Arial"/>
-              </a:rPr>
-              <a:t>EDA </a:t>
-            </a:r>
-            <a:r>
-              <a:rPr lang="ru-RU" sz="3300" b="0" u="none" strike="noStrike">
-                <a:solidFill>
-                  <a:srgbClr val="000000"/>
-                </a:solidFill>
-                <a:effectLst/>
-                <a:uFillTx/>
-                <a:latin typeface="Arial"/>
-              </a:rPr>
-              <a:t>(Иссле</a:t>
-            </a:r>
-            <a:r>
-              <a:rPr lang="ru-RU" sz="3300" b="0" u="none" strike="noStrike">
-                <a:solidFill>
-                  <a:srgbClr val="000000"/>
-                </a:solidFill>
-                <a:effectLst/>
-                <a:uFillTx/>
-                <a:latin typeface="Arial"/>
-              </a:rPr>
-              <a:t>довате</a:t>
-            </a:r>
-            <a:r>
-              <a:rPr lang="ru-RU" sz="3300" b="0" u="none" strike="noStrike">
-                <a:solidFill>
-                  <a:srgbClr val="000000"/>
-                </a:solidFill>
-                <a:effectLst/>
-                <a:uFillTx/>
-                <a:latin typeface="Arial"/>
-              </a:rPr>
-              <a:t>льский </a:t>
-            </a:r>
-            <a:r>
-              <a:rPr lang="ru-RU" sz="3300" b="0" u="none" strike="noStrike">
-                <a:solidFill>
-                  <a:srgbClr val="000000"/>
-                </a:solidFill>
-                <a:effectLst/>
-                <a:uFillTx/>
-                <a:latin typeface="Arial"/>
-              </a:rPr>
-              <a:t>анали</a:t>
-            </a:r>
-            <a:r>
-              <a:rPr lang="ru-RU" sz="3300" b="0" u="none" strike="noStrike">
-                <a:solidFill>
-                  <a:srgbClr val="000000"/>
-                </a:solidFill>
-                <a:effectLst/>
-                <a:uFillTx/>
-                <a:latin typeface="Arial"/>
-              </a:rPr>
-              <a:t>з)</a:t>
+              <a:t>Результаты EDA (Исследовательский анализ)</a:t>
             </a:r>
             <a:endParaRPr lang="ru-RU" sz="3300" b="0" u="none" strike="noStrike">
               <a:solidFill>
@@ -5524,7 +4772,7 @@
         <p:spPr>
           <a:xfrm>
             <a:off x="504000" y="1326600"/>
-            <a:ext cx="9036000" cy="3893040"/>
+            <a:ext cx="9035640" cy="3892680"/>
           </a:xfrm>
           <a:prstGeom prst="rect">
             <a:avLst/>
@@ -5540,10 +4788,16 @@
           </a:bodyPr>
           <a:p>
             <a:pPr indent="0" algn="l">
+              <a:lnSpc>
+                <a:spcPct val="100000"/>
+              </a:lnSpc>
               <a:spcBef>
                 <a:spcPts val="1060"/>
               </a:spcBef>
               <a:buNone/>
+              <a:tabLst>
+                <a:tab pos="0" algn="l"/>
+              </a:tabLst>
             </a:pPr>
             <a:r>
               <a:rPr lang="ru-RU" sz="2000" b="0" u="none" strike="noStrike">
@@ -5554,7 +4808,7 @@
                 <a:uFillTx/>
                 <a:latin typeface="Arial"/>
               </a:rPr>
-              <a:t>- Пропуски и аномалии: Выявлены пропуски в признаках `age` и `blood_pressure_status`, которые обрабатываются на этапе автоматического конвейера (пайплайна).</a:t>
+              <a:t>Источник: Анонимизированная выгрузка 1500 электронных медицинских карт (`adverse_drug_reactions.csv`).</a:t>
             </a:r>
             <a:endParaRPr lang="ru-RU" sz="2000" b="0" u="none" strike="noStrike">
               <a:solidFill>
@@ -5567,10 +4821,16 @@
           </a:p>
           <a:p>
             <a:pPr indent="0" algn="l">
+              <a:lnSpc>
+                <a:spcPct val="100000"/>
+              </a:lnSpc>
               <a:spcBef>
                 <a:spcPts val="1060"/>
               </a:spcBef>
               <a:buNone/>
+              <a:tabLst>
+                <a:tab pos="0" algn="l"/>
+              </a:tabLst>
             </a:pPr>
             <a:r>
               <a:rPr lang="ru-RU" sz="2000" b="0" u="none" strike="noStrike">
@@ -5581,7 +4841,7 @@
                 <a:uFillTx/>
                 <a:latin typeface="Arial"/>
               </a:rPr>
-              <a:t>- Дисбаланс классов: Распределение целевого признака `severe_adr` составляет около 35% (тяжелые случаи) к 65% (стабильные случаи). Это учтено при стратификации выборки (параметр `stratify=y` при разбиении).</a:t>
+              <a:t>* Дисбаланс классов:  ~35% тяжелых случаев к ~65% стабильных исходов (учтено при стратификации).</a:t>
             </a:r>
             <a:endParaRPr lang="ru-RU" sz="2000" b="0" u="none" strike="noStrike">
               <a:solidFill>
@@ -5594,10 +4854,16 @@
           </a:p>
           <a:p>
             <a:pPr indent="0" algn="l">
+              <a:lnSpc>
+                <a:spcPct val="100000"/>
+              </a:lnSpc>
               <a:spcBef>
                 <a:spcPts val="1060"/>
               </a:spcBef>
               <a:buNone/>
+              <a:tabLst>
+                <a:tab pos="0" algn="l"/>
+              </a:tabLst>
             </a:pPr>
             <a:r>
               <a:rPr lang="ru-RU" sz="2000" b="0" u="none" strike="noStrike">
@@ -5608,7 +4874,7 @@
                 <a:uFillTx/>
                 <a:latin typeface="Arial"/>
               </a:rPr>
-              <a:t>- Ключевой инсайт: Обнаружена сильная прямая зависимость между показателем полипрагмазии и частотой тяжелых исходов. Рост числа одновременно принимаемых лекарств критически увеличивает вероятность побочной реакции (визуализировано графиками target_distribution.png и polypharmacy_impact.png).</a:t>
+              <a:t>* Главный инсайт (Полипрагмазия):  Диаграмма размаха четко показывает связь рисков с количеством лекарств. Медиана назначений у стабильных пациентов составляет 3 препарата, тогда как у пациентов с тяжелыми осложнениями она сдвинута к 6 препаратам.</a:t>
             </a:r>
             <a:endParaRPr lang="ru-RU" sz="2000" b="0" u="none" strike="noStrike">
               <a:solidFill>
@@ -5621,10 +4887,49 @@
           </a:p>
           <a:p>
             <a:pPr indent="0" algn="l">
+              <a:lnSpc>
+                <a:spcPct val="100000"/>
+              </a:lnSpc>
               <a:spcBef>
                 <a:spcPts val="1060"/>
               </a:spcBef>
               <a:buNone/>
+              <a:tabLst>
+                <a:tab pos="0" algn="l"/>
+              </a:tabLst>
+            </a:pPr>
+            <a:r>
+              <a:rPr lang="ru-RU" sz="2000" b="0" u="none" strike="noStrike">
+                <a:solidFill>
+                  <a:srgbClr val="000000"/>
+                </a:solidFill>
+                <a:effectLst/>
+                <a:uFillTx/>
+                <a:latin typeface="Arial"/>
+              </a:rPr>
+              <a:t>* Иллюстрации на слайде: `target_distribution.png` и `polypharmacy_impact.png` (Boxplot).</a:t>
+            </a:r>
+            <a:endParaRPr lang="ru-RU" sz="2000" b="0" u="none" strike="noStrike">
+              <a:solidFill>
+                <a:srgbClr val="000000"/>
+              </a:solidFill>
+              <a:effectLst/>
+              <a:uFillTx/>
+              <a:latin typeface="Arial"/>
+            </a:endParaRPr>
+          </a:p>
+          <a:p>
+            <a:pPr indent="0" algn="l">
+              <a:lnSpc>
+                <a:spcPct val="100000"/>
+              </a:lnSpc>
+              <a:spcBef>
+                <a:spcPts val="1060"/>
+              </a:spcBef>
+              <a:buNone/>
+              <a:tabLst>
+                <a:tab pos="0" algn="l"/>
+              </a:tabLst>
             </a:pPr>
             <a:endParaRPr lang="ru-RU" sz="2400" b="0" u="none" strike="noStrike">
               <a:solidFill>
@@ -5679,8 +4984,8 @@
         </p:nvSpPr>
         <p:spPr>
           <a:xfrm>
-            <a:off x="504000" y="447120"/>
-            <a:ext cx="9071640" cy="503280"/>
+            <a:off x="504000" y="446760"/>
+            <a:ext cx="9071280" cy="503640"/>
           </a:xfrm>
           <a:prstGeom prst="rect">
             <a:avLst/>
@@ -5696,6 +5001,9 @@
           </a:bodyPr>
           <a:p>
             <a:pPr indent="0" algn="ctr">
+              <a:lnSpc>
+                <a:spcPct val="100000"/>
+              </a:lnSpc>
               <a:buNone/>
               <a:tabLst>
                 <a:tab pos="0" algn="l"/>
@@ -5736,7 +5044,7 @@
         <p:spPr>
           <a:xfrm>
             <a:off x="4860000" y="1203480"/>
-            <a:ext cx="4680000" cy="4196520"/>
+            <a:ext cx="4679640" cy="4196160"/>
           </a:xfrm>
           <a:prstGeom prst="rect">
             <a:avLst/>
@@ -5760,7 +5068,7 @@
         <p:spPr>
           <a:xfrm>
             <a:off x="360000" y="1260000"/>
-            <a:ext cx="4500000" cy="3960000"/>
+            <a:ext cx="4499640" cy="3959640"/>
           </a:xfrm>
           <a:prstGeom prst="rect">
             <a:avLst/>
@@ -5813,8 +5121,8 @@
         </p:nvSpPr>
         <p:spPr>
           <a:xfrm>
-            <a:off x="504000" y="225360"/>
-            <a:ext cx="9071640" cy="947160"/>
+            <a:off x="504000" y="225000"/>
+            <a:ext cx="9071280" cy="947520"/>
           </a:xfrm>
           <a:prstGeom prst="rect">
             <a:avLst/>
@@ -5847,106 +5155,7 @@
                 <a:uFillTx/>
                 <a:latin typeface="Arial"/>
               </a:rPr>
-              <a:t>Предо</a:t>
-            </a:r>
-            <a:r>
-              <a:rPr lang="ru-RU" sz="3300" b="0" u="none" strike="noStrike">
-                <a:solidFill>
-                  <a:srgbClr val="000000"/>
-                </a:solidFill>
-                <a:effectLst/>
-                <a:uFillTx/>
-                <a:latin typeface="Arial"/>
-              </a:rPr>
-              <a:t>брабо</a:t>
-            </a:r>
-            <a:r>
-              <a:rPr lang="ru-RU" sz="3300" b="0" u="none" strike="noStrike">
-                <a:solidFill>
-                  <a:srgbClr val="000000"/>
-                </a:solidFill>
-                <a:effectLst/>
-                <a:uFillTx/>
-                <a:latin typeface="Arial"/>
-              </a:rPr>
-              <a:t>тка </a:t>
-            </a:r>
-            <a:r>
-              <a:rPr lang="ru-RU" sz="3300" b="0" u="none" strike="noStrike">
-                <a:solidFill>
-                  <a:srgbClr val="000000"/>
-                </a:solidFill>
-                <a:effectLst/>
-                <a:uFillTx/>
-                <a:latin typeface="Arial"/>
-              </a:rPr>
-              <a:t>данны</a:t>
-            </a:r>
-            <a:r>
-              <a:rPr lang="ru-RU" sz="3300" b="0" u="none" strike="noStrike">
-                <a:solidFill>
-                  <a:srgbClr val="000000"/>
-                </a:solidFill>
-                <a:effectLst/>
-                <a:uFillTx/>
-                <a:latin typeface="Arial"/>
-              </a:rPr>
-              <a:t>х и </a:t>
-            </a:r>
-            <a:r>
-              <a:rPr lang="ru-RU" sz="3300" b="0" u="none" strike="noStrike">
-                <a:solidFill>
-                  <a:srgbClr val="000000"/>
-                </a:solidFill>
-                <a:effectLst/>
-                <a:uFillTx/>
-                <a:latin typeface="Arial"/>
-              </a:rPr>
-              <a:t>Пайпл</a:t>
-            </a:r>
-            <a:r>
-              <a:rPr lang="ru-RU" sz="3300" b="0" u="none" strike="noStrike">
-                <a:solidFill>
-                  <a:srgbClr val="000000"/>
-                </a:solidFill>
-                <a:effectLst/>
-                <a:uFillTx/>
-                <a:latin typeface="Arial"/>
-              </a:rPr>
-              <a:t>айны </a:t>
-            </a:r>
-            <a:r>
-              <a:rPr lang="ru-RU" sz="3300" b="0" u="none" strike="noStrike">
-                <a:solidFill>
-                  <a:srgbClr val="000000"/>
-                </a:solidFill>
-                <a:effectLst/>
-                <a:uFillTx/>
-                <a:latin typeface="Arial"/>
-              </a:rPr>
-              <a:t>(Prepr</a:t>
-            </a:r>
-            <a:r>
-              <a:rPr lang="ru-RU" sz="3300" b="0" u="none" strike="noStrike">
-                <a:solidFill>
-                  <a:srgbClr val="000000"/>
-                </a:solidFill>
-                <a:effectLst/>
-                <a:uFillTx/>
-                <a:latin typeface="Arial"/>
-              </a:rPr>
-              <a:t>ocessi</a:t>
-            </a:r>
-            <a:r>
-              <a:rPr lang="ru-RU" sz="3300" b="0" u="none" strike="noStrike">
-                <a:solidFill>
-                  <a:srgbClr val="000000"/>
-                </a:solidFill>
-                <a:effectLst/>
-                <a:uFillTx/>
-                <a:latin typeface="Arial"/>
-              </a:rPr>
-              <a:t>ng)</a:t>
+              <a:t>Предобработка данных и Пайплайны (Preprocessing)</a:t>
             </a:r>
             <a:endParaRPr lang="ru-RU" sz="3300" b="0" u="none" strike="noStrike">
               <a:solidFill>
@@ -5962,13 +5171,13 @@
       <p:sp>
         <p:nvSpPr>
           <p:cNvPr id="36" name=""/>
-          <p:cNvSpPr txBox="1"/>
+          <p:cNvSpPr/>
           <p:nvPr/>
         </p:nvSpPr>
         <p:spPr>
           <a:xfrm>
             <a:off x="212400" y="1260000"/>
-            <a:ext cx="9690120" cy="4120560"/>
+            <a:ext cx="9689760" cy="4120200"/>
           </a:xfrm>
           <a:prstGeom prst="rect">
             <a:avLst/>
@@ -5978,11 +5187,22 @@
             <a:noFill/>
           </a:ln>
         </p:spPr>
+        <p:style>
+          <a:lnRef idx="0"/>
+          <a:fillRef idx="0"/>
+          <a:effectRef idx="0"/>
+          <a:fontRef idx="minor"/>
+        </p:style>
         <p:txBody>
           <a:bodyPr lIns="90000" tIns="45000" rIns="90000" bIns="45000" anchor="t">
             <a:spAutoFit/>
           </a:bodyPr>
           <a:p>
+            <a:pPr>
+              <a:lnSpc>
+                <a:spcPct val="100000"/>
+              </a:lnSpc>
+            </a:pPr>
             <a:r>
               <a:rPr lang="ru-RU" sz="1800" b="0" u="none" strike="noStrike">
                 <a:solidFill>
@@ -6003,8 +5223,23 @@
                 <a:uFillTx/>
                 <a:latin typeface="Arial"/>
               </a:rPr>
-              <a:t>Защита </a:t>
-            </a:r>
+              <a:t>Защита от утечки данных (Data Leakage): Вся предобработка строго инкапсулирована в Sklearn Pipelines и ColumnTransformer, разделяя логику для типов признаков.</a:t>
+            </a:r>
+            <a:endParaRPr lang="ru-RU" sz="2000" b="0" u="none" strike="noStrike">
+              <a:solidFill>
+                <a:srgbClr val="000000"/>
+              </a:solidFill>
+              <a:effectLst/>
+              <a:uFillTx/>
+              <a:latin typeface="Arial"/>
+            </a:endParaRPr>
+          </a:p>
+          <a:p>
+            <a:pPr>
+              <a:lnSpc>
+                <a:spcPct val="100000"/>
+              </a:lnSpc>
+            </a:pPr>
             <a:r>
               <a:rPr lang="ru-RU" sz="2000" b="0" u="none" strike="noStrike">
                 <a:solidFill>
@@ -6014,8 +5249,23 @@
                 <a:uFillTx/>
                 <a:latin typeface="Arial"/>
               </a:rPr>
-              <a:t>от утечки </a:t>
-            </a:r>
+              <a:t>- Числовые признаки (`age`, `dosage_mg`, `polypharmacy_count`):</a:t>
+            </a:r>
+            <a:endParaRPr lang="ru-RU" sz="2000" b="0" u="none" strike="noStrike">
+              <a:solidFill>
+                <a:srgbClr val="000000"/>
+              </a:solidFill>
+              <a:effectLst/>
+              <a:uFillTx/>
+              <a:latin typeface="Arial"/>
+            </a:endParaRPr>
+          </a:p>
+          <a:p>
+            <a:pPr>
+              <a:lnSpc>
+                <a:spcPct val="100000"/>
+              </a:lnSpc>
+            </a:pPr>
             <a:r>
               <a:rPr lang="ru-RU" sz="2000" b="0" u="none" strike="noStrike">
                 <a:solidFill>
@@ -6025,8 +5275,23 @@
                 <a:uFillTx/>
                 <a:latin typeface="Arial"/>
               </a:rPr>
-              <a:t>данных </a:t>
-            </a:r>
+              <a:t>  * Заполнение пропусков медианным значением (`SimpleImputer(strategy='median')`).</a:t>
+            </a:r>
+            <a:endParaRPr lang="ru-RU" sz="2000" b="0" u="none" strike="noStrike">
+              <a:solidFill>
+                <a:srgbClr val="000000"/>
+              </a:solidFill>
+              <a:effectLst/>
+              <a:uFillTx/>
+              <a:latin typeface="Arial"/>
+            </a:endParaRPr>
+          </a:p>
+          <a:p>
+            <a:pPr>
+              <a:lnSpc>
+                <a:spcPct val="100000"/>
+              </a:lnSpc>
+            </a:pPr>
             <a:r>
               <a:rPr lang="ru-RU" sz="2000" b="0" u="none" strike="noStrike">
                 <a:solidFill>
@@ -6036,8 +5301,23 @@
                 <a:uFillTx/>
                 <a:latin typeface="Arial"/>
               </a:rPr>
-              <a:t>(Data </a:t>
-            </a:r>
+              <a:t>  * Стандартизация значений (`StandardScaler`).</a:t>
+            </a:r>
+            <a:endParaRPr lang="ru-RU" sz="2000" b="0" u="none" strike="noStrike">
+              <a:solidFill>
+                <a:srgbClr val="000000"/>
+              </a:solidFill>
+              <a:effectLst/>
+              <a:uFillTx/>
+              <a:latin typeface="Arial"/>
+            </a:endParaRPr>
+          </a:p>
+          <a:p>
+            <a:pPr>
+              <a:lnSpc>
+                <a:spcPct val="100000"/>
+              </a:lnSpc>
+            </a:pPr>
             <a:r>
               <a:rPr lang="ru-RU" sz="2000" b="0" u="none" strike="noStrike">
                 <a:solidFill>
@@ -6047,8 +5327,23 @@
                 <a:uFillTx/>
                 <a:latin typeface="Arial"/>
               </a:rPr>
-              <a:t>Leakage): </a:t>
-            </a:r>
+              <a:t>- Категориальные признаки (`gender`, `drug_class`, `blood_pressure_status`):</a:t>
+            </a:r>
+            <a:endParaRPr lang="ru-RU" sz="2000" b="0" u="none" strike="noStrike">
+              <a:solidFill>
+                <a:srgbClr val="000000"/>
+              </a:solidFill>
+              <a:effectLst/>
+              <a:uFillTx/>
+              <a:latin typeface="Arial"/>
+            </a:endParaRPr>
+          </a:p>
+          <a:p>
+            <a:pPr>
+              <a:lnSpc>
+                <a:spcPct val="100000"/>
+              </a:lnSpc>
+            </a:pPr>
             <a:r>
               <a:rPr lang="ru-RU" sz="2000" b="0" u="none" strike="noStrike">
                 <a:solidFill>
@@ -6058,8 +5353,23 @@
                 <a:uFillTx/>
                 <a:latin typeface="Arial"/>
               </a:rPr>
-              <a:t>Вся </a:t>
-            </a:r>
+              <a:t>  * Заполнение пропусков модой (`SimpleImputer(strategy='most_frequent')`).</a:t>
+            </a:r>
+            <a:endParaRPr lang="ru-RU" sz="2000" b="0" u="none" strike="noStrike">
+              <a:solidFill>
+                <a:srgbClr val="000000"/>
+              </a:solidFill>
+              <a:effectLst/>
+              <a:uFillTx/>
+              <a:latin typeface="Arial"/>
+            </a:endParaRPr>
+          </a:p>
+          <a:p>
+            <a:pPr>
+              <a:lnSpc>
+                <a:spcPct val="100000"/>
+              </a:lnSpc>
+            </a:pPr>
             <a:r>
               <a:rPr lang="ru-RU" sz="2000" b="0" u="none" strike="noStrike">
                 <a:solidFill>
@@ -6069,8 +5379,23 @@
                 <a:uFillTx/>
                 <a:latin typeface="Arial"/>
               </a:rPr>
-              <a:t>предобраб</a:t>
-            </a:r>
+              <a:t>  * Прямое кодирование (`OneHotEncoder(drop='first', handle_unknown='ignore')`) для предотвращения мультиколлинеарности.</a:t>
+            </a:r>
+            <a:endParaRPr lang="ru-RU" sz="2000" b="0" u="none" strike="noStrike">
+              <a:solidFill>
+                <a:srgbClr val="000000"/>
+              </a:solidFill>
+              <a:effectLst/>
+              <a:uFillTx/>
+              <a:latin typeface="Arial"/>
+            </a:endParaRPr>
+          </a:p>
+          <a:p>
+            <a:pPr>
+              <a:lnSpc>
+                <a:spcPct val="100000"/>
+              </a:lnSpc>
+            </a:pPr>
             <a:r>
               <a:rPr lang="ru-RU" sz="2000" b="0" u="none" strike="noStrike">
                 <a:solidFill>
@@ -6080,957 +5405,7 @@
                 <a:uFillTx/>
                 <a:latin typeface="Arial"/>
               </a:rPr>
-              <a:t>отка строго </a:t>
-            </a:r>
-            <a:r>
-              <a:rPr lang="ru-RU" sz="2000" b="0" u="none" strike="noStrike">
-                <a:solidFill>
-                  <a:srgbClr val="000000"/>
-                </a:solidFill>
-                <a:effectLst/>
-                <a:uFillTx/>
-                <a:latin typeface="Arial"/>
-              </a:rPr>
-              <a:t>инкапсули</a:t>
-            </a:r>
-            <a:r>
-              <a:rPr lang="ru-RU" sz="2000" b="0" u="none" strike="noStrike">
-                <a:solidFill>
-                  <a:srgbClr val="000000"/>
-                </a:solidFill>
-                <a:effectLst/>
-                <a:uFillTx/>
-                <a:latin typeface="Arial"/>
-              </a:rPr>
-              <a:t>рована в </a:t>
-            </a:r>
-            <a:r>
-              <a:rPr lang="ru-RU" sz="2000" b="0" u="none" strike="noStrike">
-                <a:solidFill>
-                  <a:srgbClr val="000000"/>
-                </a:solidFill>
-                <a:effectLst/>
-                <a:uFillTx/>
-                <a:latin typeface="Arial"/>
-              </a:rPr>
-              <a:t>Sklearn </a:t>
-            </a:r>
-            <a:r>
-              <a:rPr lang="ru-RU" sz="2000" b="0" u="none" strike="noStrike">
-                <a:solidFill>
-                  <a:srgbClr val="000000"/>
-                </a:solidFill>
-                <a:effectLst/>
-                <a:uFillTx/>
-                <a:latin typeface="Arial"/>
-              </a:rPr>
-              <a:t>Pipelines и </a:t>
-            </a:r>
-            <a:r>
-              <a:rPr lang="ru-RU" sz="2000" b="0" u="none" strike="noStrike">
-                <a:solidFill>
-                  <a:srgbClr val="000000"/>
-                </a:solidFill>
-                <a:effectLst/>
-                <a:uFillTx/>
-                <a:latin typeface="Arial"/>
-              </a:rPr>
-              <a:t>ColumnTra</a:t>
-            </a:r>
-            <a:r>
-              <a:rPr lang="ru-RU" sz="2000" b="0" u="none" strike="noStrike">
-                <a:solidFill>
-                  <a:srgbClr val="000000"/>
-                </a:solidFill>
-                <a:effectLst/>
-                <a:uFillTx/>
-                <a:latin typeface="Arial"/>
-              </a:rPr>
-              <a:t>nsformer, </a:t>
-            </a:r>
-            <a:r>
-              <a:rPr lang="ru-RU" sz="2000" b="0" u="none" strike="noStrike">
-                <a:solidFill>
-                  <a:srgbClr val="000000"/>
-                </a:solidFill>
-                <a:effectLst/>
-                <a:uFillTx/>
-                <a:latin typeface="Arial"/>
-              </a:rPr>
-              <a:t>разделяя </a:t>
-            </a:r>
-            <a:r>
-              <a:rPr lang="ru-RU" sz="2000" b="0" u="none" strike="noStrike">
-                <a:solidFill>
-                  <a:srgbClr val="000000"/>
-                </a:solidFill>
-                <a:effectLst/>
-                <a:uFillTx/>
-                <a:latin typeface="Arial"/>
-              </a:rPr>
-              <a:t>логику для </a:t>
-            </a:r>
-            <a:r>
-              <a:rPr lang="ru-RU" sz="2000" b="0" u="none" strike="noStrike">
-                <a:solidFill>
-                  <a:srgbClr val="000000"/>
-                </a:solidFill>
-                <a:effectLst/>
-                <a:uFillTx/>
-                <a:latin typeface="Arial"/>
-              </a:rPr>
-              <a:t>типов </a:t>
-            </a:r>
-            <a:r>
-              <a:rPr lang="ru-RU" sz="2000" b="0" u="none" strike="noStrike">
-                <a:solidFill>
-                  <a:srgbClr val="000000"/>
-                </a:solidFill>
-                <a:effectLst/>
-                <a:uFillTx/>
-                <a:latin typeface="Arial"/>
-              </a:rPr>
-              <a:t>признаков.</a:t>
-            </a:r>
-            <a:endParaRPr lang="ru-RU" sz="2000" b="0" u="none" strike="noStrike">
-              <a:solidFill>
-                <a:srgbClr val="000000"/>
-              </a:solidFill>
-              <a:effectLst/>
-              <a:uFillTx/>
-              <a:latin typeface="Arial"/>
-            </a:endParaRPr>
-          </a:p>
-          <a:p>
-            <a:r>
-              <a:rPr lang="ru-RU" sz="2000" b="0" u="none" strike="noStrike">
-                <a:solidFill>
-                  <a:srgbClr val="000000"/>
-                </a:solidFill>
-                <a:effectLst/>
-                <a:uFillTx/>
-                <a:latin typeface="Arial"/>
-              </a:rPr>
-              <a:t>- </a:t>
-            </a:r>
-            <a:r>
-              <a:rPr lang="ru-RU" sz="2000" b="0" u="none" strike="noStrike">
-                <a:solidFill>
-                  <a:srgbClr val="000000"/>
-                </a:solidFill>
-                <a:effectLst/>
-                <a:uFillTx/>
-                <a:latin typeface="Arial"/>
-              </a:rPr>
-              <a:t>Числовые </a:t>
-            </a:r>
-            <a:r>
-              <a:rPr lang="ru-RU" sz="2000" b="0" u="none" strike="noStrike">
-                <a:solidFill>
-                  <a:srgbClr val="000000"/>
-                </a:solidFill>
-                <a:effectLst/>
-                <a:uFillTx/>
-                <a:latin typeface="Arial"/>
-              </a:rPr>
-              <a:t>признаки </a:t>
-            </a:r>
-            <a:r>
-              <a:rPr lang="ru-RU" sz="2000" b="0" u="none" strike="noStrike">
-                <a:solidFill>
-                  <a:srgbClr val="000000"/>
-                </a:solidFill>
-                <a:effectLst/>
-                <a:uFillTx/>
-                <a:latin typeface="Arial"/>
-              </a:rPr>
-              <a:t>(`age`, </a:t>
-            </a:r>
-            <a:r>
-              <a:rPr lang="ru-RU" sz="2000" b="0" u="none" strike="noStrike">
-                <a:solidFill>
-                  <a:srgbClr val="000000"/>
-                </a:solidFill>
-                <a:effectLst/>
-                <a:uFillTx/>
-                <a:latin typeface="Arial"/>
-              </a:rPr>
-              <a:t>`dosage_m</a:t>
-            </a:r>
-            <a:r>
-              <a:rPr lang="ru-RU" sz="2000" b="0" u="none" strike="noStrike">
-                <a:solidFill>
-                  <a:srgbClr val="000000"/>
-                </a:solidFill>
-                <a:effectLst/>
-                <a:uFillTx/>
-                <a:latin typeface="Arial"/>
-              </a:rPr>
-              <a:t>g`, </a:t>
-            </a:r>
-            <a:r>
-              <a:rPr lang="ru-RU" sz="2000" b="0" u="none" strike="noStrike">
-                <a:solidFill>
-                  <a:srgbClr val="000000"/>
-                </a:solidFill>
-                <a:effectLst/>
-                <a:uFillTx/>
-                <a:latin typeface="Arial"/>
-              </a:rPr>
-              <a:t>`polypharm</a:t>
-            </a:r>
-            <a:r>
-              <a:rPr lang="ru-RU" sz="2000" b="0" u="none" strike="noStrike">
-                <a:solidFill>
-                  <a:srgbClr val="000000"/>
-                </a:solidFill>
-                <a:effectLst/>
-                <a:uFillTx/>
-                <a:latin typeface="Arial"/>
-              </a:rPr>
-              <a:t>acy_count`)</a:t>
-            </a:r>
-            <a:r>
-              <a:rPr lang="ru-RU" sz="2000" b="0" u="none" strike="noStrike">
-                <a:solidFill>
-                  <a:srgbClr val="000000"/>
-                </a:solidFill>
-                <a:effectLst/>
-                <a:uFillTx/>
-                <a:latin typeface="Arial"/>
-              </a:rPr>
-              <a:t>:</a:t>
-            </a:r>
-            <a:endParaRPr lang="ru-RU" sz="2000" b="0" u="none" strike="noStrike">
-              <a:solidFill>
-                <a:srgbClr val="000000"/>
-              </a:solidFill>
-              <a:effectLst/>
-              <a:uFillTx/>
-              <a:latin typeface="Arial"/>
-            </a:endParaRPr>
-          </a:p>
-          <a:p>
-            <a:r>
-              <a:rPr lang="ru-RU" sz="2000" b="0" u="none" strike="noStrike">
-                <a:solidFill>
-                  <a:srgbClr val="000000"/>
-                </a:solidFill>
-                <a:effectLst/>
-                <a:uFillTx/>
-                <a:latin typeface="Arial"/>
-              </a:rPr>
-              <a:t>  * </a:t>
-            </a:r>
-            <a:r>
-              <a:rPr lang="ru-RU" sz="2000" b="0" u="none" strike="noStrike">
-                <a:solidFill>
-                  <a:srgbClr val="000000"/>
-                </a:solidFill>
-                <a:effectLst/>
-                <a:uFillTx/>
-                <a:latin typeface="Arial"/>
-              </a:rPr>
-              <a:t>Заполнени</a:t>
-            </a:r>
-            <a:r>
-              <a:rPr lang="ru-RU" sz="2000" b="0" u="none" strike="noStrike">
-                <a:solidFill>
-                  <a:srgbClr val="000000"/>
-                </a:solidFill>
-                <a:effectLst/>
-                <a:uFillTx/>
-                <a:latin typeface="Arial"/>
-              </a:rPr>
-              <a:t>е </a:t>
-            </a:r>
-            <a:r>
-              <a:rPr lang="ru-RU" sz="2000" b="0" u="none" strike="noStrike">
-                <a:solidFill>
-                  <a:srgbClr val="000000"/>
-                </a:solidFill>
-                <a:effectLst/>
-                <a:uFillTx/>
-                <a:latin typeface="Arial"/>
-              </a:rPr>
-              <a:t>пропусков </a:t>
-            </a:r>
-            <a:r>
-              <a:rPr lang="ru-RU" sz="2000" b="0" u="none" strike="noStrike">
-                <a:solidFill>
-                  <a:srgbClr val="000000"/>
-                </a:solidFill>
-                <a:effectLst/>
-                <a:uFillTx/>
-                <a:latin typeface="Arial"/>
-              </a:rPr>
-              <a:t>медианны</a:t>
-            </a:r>
-            <a:r>
-              <a:rPr lang="ru-RU" sz="2000" b="0" u="none" strike="noStrike">
-                <a:solidFill>
-                  <a:srgbClr val="000000"/>
-                </a:solidFill>
-                <a:effectLst/>
-                <a:uFillTx/>
-                <a:latin typeface="Arial"/>
-              </a:rPr>
-              <a:t>м </a:t>
-            </a:r>
-            <a:r>
-              <a:rPr lang="ru-RU" sz="2000" b="0" u="none" strike="noStrike">
-                <a:solidFill>
-                  <a:srgbClr val="000000"/>
-                </a:solidFill>
-                <a:effectLst/>
-                <a:uFillTx/>
-                <a:latin typeface="Arial"/>
-              </a:rPr>
-              <a:t>значением </a:t>
-            </a:r>
-            <a:r>
-              <a:rPr lang="ru-RU" sz="2000" b="0" u="none" strike="noStrike">
-                <a:solidFill>
-                  <a:srgbClr val="000000"/>
-                </a:solidFill>
-                <a:effectLst/>
-                <a:uFillTx/>
-                <a:latin typeface="Arial"/>
-              </a:rPr>
-              <a:t>(`SimpleIm</a:t>
-            </a:r>
-            <a:r>
-              <a:rPr lang="ru-RU" sz="2000" b="0" u="none" strike="noStrike">
-                <a:solidFill>
-                  <a:srgbClr val="000000"/>
-                </a:solidFill>
-                <a:effectLst/>
-                <a:uFillTx/>
-                <a:latin typeface="Arial"/>
-              </a:rPr>
-              <a:t>puter(strate</a:t>
-            </a:r>
-            <a:r>
-              <a:rPr lang="ru-RU" sz="2000" b="0" u="none" strike="noStrike">
-                <a:solidFill>
-                  <a:srgbClr val="000000"/>
-                </a:solidFill>
-                <a:effectLst/>
-                <a:uFillTx/>
-                <a:latin typeface="Arial"/>
-              </a:rPr>
-              <a:t>gy='median</a:t>
-            </a:r>
-            <a:r>
-              <a:rPr lang="ru-RU" sz="2000" b="0" u="none" strike="noStrike">
-                <a:solidFill>
-                  <a:srgbClr val="000000"/>
-                </a:solidFill>
-                <a:effectLst/>
-                <a:uFillTx/>
-                <a:latin typeface="Arial"/>
-              </a:rPr>
-              <a:t>')`).</a:t>
-            </a:r>
-            <a:endParaRPr lang="ru-RU" sz="2000" b="0" u="none" strike="noStrike">
-              <a:solidFill>
-                <a:srgbClr val="000000"/>
-              </a:solidFill>
-              <a:effectLst/>
-              <a:uFillTx/>
-              <a:latin typeface="Arial"/>
-            </a:endParaRPr>
-          </a:p>
-          <a:p>
-            <a:r>
-              <a:rPr lang="ru-RU" sz="2000" b="0" u="none" strike="noStrike">
-                <a:solidFill>
-                  <a:srgbClr val="000000"/>
-                </a:solidFill>
-                <a:effectLst/>
-                <a:uFillTx/>
-                <a:latin typeface="Arial"/>
-              </a:rPr>
-              <a:t>  * </a:t>
-            </a:r>
-            <a:r>
-              <a:rPr lang="ru-RU" sz="2000" b="0" u="none" strike="noStrike">
-                <a:solidFill>
-                  <a:srgbClr val="000000"/>
-                </a:solidFill>
-                <a:effectLst/>
-                <a:uFillTx/>
-                <a:latin typeface="Arial"/>
-              </a:rPr>
-              <a:t>Стандарти</a:t>
-            </a:r>
-            <a:r>
-              <a:rPr lang="ru-RU" sz="2000" b="0" u="none" strike="noStrike">
-                <a:solidFill>
-                  <a:srgbClr val="000000"/>
-                </a:solidFill>
-                <a:effectLst/>
-                <a:uFillTx/>
-                <a:latin typeface="Arial"/>
-              </a:rPr>
-              <a:t>зация </a:t>
-            </a:r>
-            <a:r>
-              <a:rPr lang="ru-RU" sz="2000" b="0" u="none" strike="noStrike">
-                <a:solidFill>
-                  <a:srgbClr val="000000"/>
-                </a:solidFill>
-                <a:effectLst/>
-                <a:uFillTx/>
-                <a:latin typeface="Arial"/>
-              </a:rPr>
-              <a:t>значений </a:t>
-            </a:r>
-            <a:r>
-              <a:rPr lang="ru-RU" sz="2000" b="0" u="none" strike="noStrike">
-                <a:solidFill>
-                  <a:srgbClr val="000000"/>
-                </a:solidFill>
-                <a:effectLst/>
-                <a:uFillTx/>
-                <a:latin typeface="Arial"/>
-              </a:rPr>
-              <a:t>(`Standard</a:t>
-            </a:r>
-            <a:r>
-              <a:rPr lang="ru-RU" sz="2000" b="0" u="none" strike="noStrike">
-                <a:solidFill>
-                  <a:srgbClr val="000000"/>
-                </a:solidFill>
-                <a:effectLst/>
-                <a:uFillTx/>
-                <a:latin typeface="Arial"/>
-              </a:rPr>
-              <a:t>Scaler`).</a:t>
-            </a:r>
-            <a:endParaRPr lang="ru-RU" sz="2000" b="0" u="none" strike="noStrike">
-              <a:solidFill>
-                <a:srgbClr val="000000"/>
-              </a:solidFill>
-              <a:effectLst/>
-              <a:uFillTx/>
-              <a:latin typeface="Arial"/>
-            </a:endParaRPr>
-          </a:p>
-          <a:p>
-            <a:r>
-              <a:rPr lang="ru-RU" sz="2000" b="0" u="none" strike="noStrike">
-                <a:solidFill>
-                  <a:srgbClr val="000000"/>
-                </a:solidFill>
-                <a:effectLst/>
-                <a:uFillTx/>
-                <a:latin typeface="Arial"/>
-              </a:rPr>
-              <a:t>- </a:t>
-            </a:r>
-            <a:r>
-              <a:rPr lang="ru-RU" sz="2000" b="0" u="none" strike="noStrike">
-                <a:solidFill>
-                  <a:srgbClr val="000000"/>
-                </a:solidFill>
-                <a:effectLst/>
-                <a:uFillTx/>
-                <a:latin typeface="Arial"/>
-              </a:rPr>
-              <a:t>Категориал</a:t>
-            </a:r>
-            <a:r>
-              <a:rPr lang="ru-RU" sz="2000" b="0" u="none" strike="noStrike">
-                <a:solidFill>
-                  <a:srgbClr val="000000"/>
-                </a:solidFill>
-                <a:effectLst/>
-                <a:uFillTx/>
-                <a:latin typeface="Arial"/>
-              </a:rPr>
-              <a:t>ьные </a:t>
-            </a:r>
-            <a:r>
-              <a:rPr lang="ru-RU" sz="2000" b="0" u="none" strike="noStrike">
-                <a:solidFill>
-                  <a:srgbClr val="000000"/>
-                </a:solidFill>
-                <a:effectLst/>
-                <a:uFillTx/>
-                <a:latin typeface="Arial"/>
-              </a:rPr>
-              <a:t>признаки </a:t>
-            </a:r>
-            <a:r>
-              <a:rPr lang="ru-RU" sz="2000" b="0" u="none" strike="noStrike">
-                <a:solidFill>
-                  <a:srgbClr val="000000"/>
-                </a:solidFill>
-                <a:effectLst/>
-                <a:uFillTx/>
-                <a:latin typeface="Arial"/>
-              </a:rPr>
-              <a:t>(`gender`, </a:t>
-            </a:r>
-            <a:r>
-              <a:rPr lang="ru-RU" sz="2000" b="0" u="none" strike="noStrike">
-                <a:solidFill>
-                  <a:srgbClr val="000000"/>
-                </a:solidFill>
-                <a:effectLst/>
-                <a:uFillTx/>
-                <a:latin typeface="Arial"/>
-              </a:rPr>
-              <a:t>`drug_class</a:t>
-            </a:r>
-            <a:r>
-              <a:rPr lang="ru-RU" sz="2000" b="0" u="none" strike="noStrike">
-                <a:solidFill>
-                  <a:srgbClr val="000000"/>
-                </a:solidFill>
-                <a:effectLst/>
-                <a:uFillTx/>
-                <a:latin typeface="Arial"/>
-              </a:rPr>
-              <a:t>`, </a:t>
-            </a:r>
-            <a:r>
-              <a:rPr lang="ru-RU" sz="2000" b="0" u="none" strike="noStrike">
-                <a:solidFill>
-                  <a:srgbClr val="000000"/>
-                </a:solidFill>
-                <a:effectLst/>
-                <a:uFillTx/>
-                <a:latin typeface="Arial"/>
-              </a:rPr>
-              <a:t>`blood_pres</a:t>
-            </a:r>
-            <a:r>
-              <a:rPr lang="ru-RU" sz="2000" b="0" u="none" strike="noStrike">
-                <a:solidFill>
-                  <a:srgbClr val="000000"/>
-                </a:solidFill>
-                <a:effectLst/>
-                <a:uFillTx/>
-                <a:latin typeface="Arial"/>
-              </a:rPr>
-              <a:t>sure_status</a:t>
-            </a:r>
-            <a:r>
-              <a:rPr lang="ru-RU" sz="2000" b="0" u="none" strike="noStrike">
-                <a:solidFill>
-                  <a:srgbClr val="000000"/>
-                </a:solidFill>
-                <a:effectLst/>
-                <a:uFillTx/>
-                <a:latin typeface="Arial"/>
-              </a:rPr>
-              <a:t>`):</a:t>
-            </a:r>
-            <a:endParaRPr lang="ru-RU" sz="2000" b="0" u="none" strike="noStrike">
-              <a:solidFill>
-                <a:srgbClr val="000000"/>
-              </a:solidFill>
-              <a:effectLst/>
-              <a:uFillTx/>
-              <a:latin typeface="Arial"/>
-            </a:endParaRPr>
-          </a:p>
-          <a:p>
-            <a:r>
-              <a:rPr lang="ru-RU" sz="2000" b="0" u="none" strike="noStrike">
-                <a:solidFill>
-                  <a:srgbClr val="000000"/>
-                </a:solidFill>
-                <a:effectLst/>
-                <a:uFillTx/>
-                <a:latin typeface="Arial"/>
-              </a:rPr>
-              <a:t>  * </a:t>
-            </a:r>
-            <a:r>
-              <a:rPr lang="ru-RU" sz="2000" b="0" u="none" strike="noStrike">
-                <a:solidFill>
-                  <a:srgbClr val="000000"/>
-                </a:solidFill>
-                <a:effectLst/>
-                <a:uFillTx/>
-                <a:latin typeface="Arial"/>
-              </a:rPr>
-              <a:t>Заполнени</a:t>
-            </a:r>
-            <a:r>
-              <a:rPr lang="ru-RU" sz="2000" b="0" u="none" strike="noStrike">
-                <a:solidFill>
-                  <a:srgbClr val="000000"/>
-                </a:solidFill>
-                <a:effectLst/>
-                <a:uFillTx/>
-                <a:latin typeface="Arial"/>
-              </a:rPr>
-              <a:t>е </a:t>
-            </a:r>
-            <a:r>
-              <a:rPr lang="ru-RU" sz="2000" b="0" u="none" strike="noStrike">
-                <a:solidFill>
-                  <a:srgbClr val="000000"/>
-                </a:solidFill>
-                <a:effectLst/>
-                <a:uFillTx/>
-                <a:latin typeface="Arial"/>
-              </a:rPr>
-              <a:t>пропусков </a:t>
-            </a:r>
-            <a:r>
-              <a:rPr lang="ru-RU" sz="2000" b="0" u="none" strike="noStrike">
-                <a:solidFill>
-                  <a:srgbClr val="000000"/>
-                </a:solidFill>
-                <a:effectLst/>
-                <a:uFillTx/>
-                <a:latin typeface="Arial"/>
-              </a:rPr>
-              <a:t>модой </a:t>
-            </a:r>
-            <a:r>
-              <a:rPr lang="ru-RU" sz="2000" b="0" u="none" strike="noStrike">
-                <a:solidFill>
-                  <a:srgbClr val="000000"/>
-                </a:solidFill>
-                <a:effectLst/>
-                <a:uFillTx/>
-                <a:latin typeface="Arial"/>
-              </a:rPr>
-              <a:t>(`SimpleIm</a:t>
-            </a:r>
-            <a:r>
-              <a:rPr lang="ru-RU" sz="2000" b="0" u="none" strike="noStrike">
-                <a:solidFill>
-                  <a:srgbClr val="000000"/>
-                </a:solidFill>
-                <a:effectLst/>
-                <a:uFillTx/>
-                <a:latin typeface="Arial"/>
-              </a:rPr>
-              <a:t>puter(strate</a:t>
-            </a:r>
-            <a:r>
-              <a:rPr lang="ru-RU" sz="2000" b="0" u="none" strike="noStrike">
-                <a:solidFill>
-                  <a:srgbClr val="000000"/>
-                </a:solidFill>
-                <a:effectLst/>
-                <a:uFillTx/>
-                <a:latin typeface="Arial"/>
-              </a:rPr>
-              <a:t>gy='most_fr</a:t>
-            </a:r>
-            <a:r>
-              <a:rPr lang="ru-RU" sz="2000" b="0" u="none" strike="noStrike">
-                <a:solidFill>
-                  <a:srgbClr val="000000"/>
-                </a:solidFill>
-                <a:effectLst/>
-                <a:uFillTx/>
-                <a:latin typeface="Arial"/>
-              </a:rPr>
-              <a:t>equent')`).</a:t>
-            </a:r>
-            <a:endParaRPr lang="ru-RU" sz="2000" b="0" u="none" strike="noStrike">
-              <a:solidFill>
-                <a:srgbClr val="000000"/>
-              </a:solidFill>
-              <a:effectLst/>
-              <a:uFillTx/>
-              <a:latin typeface="Arial"/>
-            </a:endParaRPr>
-          </a:p>
-          <a:p>
-            <a:r>
-              <a:rPr lang="ru-RU" sz="2000" b="0" u="none" strike="noStrike">
-                <a:solidFill>
-                  <a:srgbClr val="000000"/>
-                </a:solidFill>
-                <a:effectLst/>
-                <a:uFillTx/>
-                <a:latin typeface="Arial"/>
-              </a:rPr>
-              <a:t>  * Прямое </a:t>
-            </a:r>
-            <a:r>
-              <a:rPr lang="ru-RU" sz="2000" b="0" u="none" strike="noStrike">
-                <a:solidFill>
-                  <a:srgbClr val="000000"/>
-                </a:solidFill>
-                <a:effectLst/>
-                <a:uFillTx/>
-                <a:latin typeface="Arial"/>
-              </a:rPr>
-              <a:t>кодирован</a:t>
-            </a:r>
-            <a:r>
-              <a:rPr lang="ru-RU" sz="2000" b="0" u="none" strike="noStrike">
-                <a:solidFill>
-                  <a:srgbClr val="000000"/>
-                </a:solidFill>
-                <a:effectLst/>
-                <a:uFillTx/>
-                <a:latin typeface="Arial"/>
-              </a:rPr>
-              <a:t>ие </a:t>
-            </a:r>
-            <a:r>
-              <a:rPr lang="ru-RU" sz="2000" b="0" u="none" strike="noStrike">
-                <a:solidFill>
-                  <a:srgbClr val="000000"/>
-                </a:solidFill>
-                <a:effectLst/>
-                <a:uFillTx/>
-                <a:latin typeface="Arial"/>
-              </a:rPr>
-              <a:t>(`OneHotE</a:t>
-            </a:r>
-            <a:r>
-              <a:rPr lang="ru-RU" sz="2000" b="0" u="none" strike="noStrike">
-                <a:solidFill>
-                  <a:srgbClr val="000000"/>
-                </a:solidFill>
-                <a:effectLst/>
-                <a:uFillTx/>
-                <a:latin typeface="Arial"/>
-              </a:rPr>
-              <a:t>ncoder(dro</a:t>
-            </a:r>
-            <a:r>
-              <a:rPr lang="ru-RU" sz="2000" b="0" u="none" strike="noStrike">
-                <a:solidFill>
-                  <a:srgbClr val="000000"/>
-                </a:solidFill>
-                <a:effectLst/>
-                <a:uFillTx/>
-                <a:latin typeface="Arial"/>
-              </a:rPr>
-              <a:t>p='first', </a:t>
-            </a:r>
-            <a:r>
-              <a:rPr lang="ru-RU" sz="2000" b="0" u="none" strike="noStrike">
-                <a:solidFill>
-                  <a:srgbClr val="000000"/>
-                </a:solidFill>
-                <a:effectLst/>
-                <a:uFillTx/>
-                <a:latin typeface="Arial"/>
-              </a:rPr>
-              <a:t>handle_unk</a:t>
-            </a:r>
-            <a:r>
-              <a:rPr lang="ru-RU" sz="2000" b="0" u="none" strike="noStrike">
-                <a:solidFill>
-                  <a:srgbClr val="000000"/>
-                </a:solidFill>
-                <a:effectLst/>
-                <a:uFillTx/>
-                <a:latin typeface="Arial"/>
-              </a:rPr>
-              <a:t>nown='igno</a:t>
-            </a:r>
-            <a:r>
-              <a:rPr lang="ru-RU" sz="2000" b="0" u="none" strike="noStrike">
-                <a:solidFill>
-                  <a:srgbClr val="000000"/>
-                </a:solidFill>
-                <a:effectLst/>
-                <a:uFillTx/>
-                <a:latin typeface="Arial"/>
-              </a:rPr>
-              <a:t>re')`) для </a:t>
-            </a:r>
-            <a:r>
-              <a:rPr lang="ru-RU" sz="2000" b="0" u="none" strike="noStrike">
-                <a:solidFill>
-                  <a:srgbClr val="000000"/>
-                </a:solidFill>
-                <a:effectLst/>
-                <a:uFillTx/>
-                <a:latin typeface="Arial"/>
-              </a:rPr>
-              <a:t>предотвра</a:t>
-            </a:r>
-            <a:r>
-              <a:rPr lang="ru-RU" sz="2000" b="0" u="none" strike="noStrike">
-                <a:solidFill>
-                  <a:srgbClr val="000000"/>
-                </a:solidFill>
-                <a:effectLst/>
-                <a:uFillTx/>
-                <a:latin typeface="Arial"/>
-              </a:rPr>
-              <a:t>щения </a:t>
-            </a:r>
-            <a:r>
-              <a:rPr lang="ru-RU" sz="2000" b="0" u="none" strike="noStrike">
-                <a:solidFill>
-                  <a:srgbClr val="000000"/>
-                </a:solidFill>
-                <a:effectLst/>
-                <a:uFillTx/>
-                <a:latin typeface="Arial"/>
-              </a:rPr>
-              <a:t>мультикол</a:t>
-            </a:r>
-            <a:r>
-              <a:rPr lang="ru-RU" sz="2000" b="0" u="none" strike="noStrike">
-                <a:solidFill>
-                  <a:srgbClr val="000000"/>
-                </a:solidFill>
-                <a:effectLst/>
-                <a:uFillTx/>
-                <a:latin typeface="Arial"/>
-              </a:rPr>
-              <a:t>линеарнос</a:t>
-            </a:r>
-            <a:r>
-              <a:rPr lang="ru-RU" sz="2000" b="0" u="none" strike="noStrike">
-                <a:solidFill>
-                  <a:srgbClr val="000000"/>
-                </a:solidFill>
-                <a:effectLst/>
-                <a:uFillTx/>
-                <a:latin typeface="Arial"/>
-              </a:rPr>
-              <a:t>ти.</a:t>
-            </a:r>
-            <a:endParaRPr lang="ru-RU" sz="2000" b="0" u="none" strike="noStrike">
-              <a:solidFill>
-                <a:srgbClr val="000000"/>
-              </a:solidFill>
-              <a:effectLst/>
-              <a:uFillTx/>
-              <a:latin typeface="Arial"/>
-            </a:endParaRPr>
-          </a:p>
-          <a:p>
-            <a:r>
-              <a:rPr lang="ru-RU" sz="2000" b="0" u="none" strike="noStrike">
-                <a:solidFill>
-                  <a:srgbClr val="000000"/>
-                </a:solidFill>
-                <a:effectLst/>
-                <a:uFillTx/>
-                <a:latin typeface="Arial"/>
-              </a:rPr>
-              <a:t>- </a:t>
-            </a:r>
-            <a:r>
-              <a:rPr lang="ru-RU" sz="2000" b="0" u="none" strike="noStrike">
-                <a:solidFill>
-                  <a:srgbClr val="000000"/>
-                </a:solidFill>
-                <a:effectLst/>
-                <a:uFillTx/>
-                <a:latin typeface="Arial"/>
-              </a:rPr>
-              <a:t>Валидация</a:t>
-            </a:r>
-            <a:r>
-              <a:rPr lang="ru-RU" sz="2000" b="0" u="none" strike="noStrike">
-                <a:solidFill>
-                  <a:srgbClr val="000000"/>
-                </a:solidFill>
-                <a:effectLst/>
-                <a:uFillTx/>
-                <a:latin typeface="Arial"/>
-              </a:rPr>
-              <a:t>: </a:t>
-            </a:r>
-            <a:r>
-              <a:rPr lang="ru-RU" sz="2000" b="0" u="none" strike="noStrike">
-                <a:solidFill>
-                  <a:srgbClr val="000000"/>
-                </a:solidFill>
-                <a:effectLst/>
-                <a:uFillTx/>
-                <a:latin typeface="Arial"/>
-              </a:rPr>
-              <a:t>Разделени</a:t>
-            </a:r>
-            <a:r>
-              <a:rPr lang="ru-RU" sz="2000" b="0" u="none" strike="noStrike">
-                <a:solidFill>
-                  <a:srgbClr val="000000"/>
-                </a:solidFill>
-                <a:effectLst/>
-                <a:uFillTx/>
-                <a:latin typeface="Arial"/>
-              </a:rPr>
-              <a:t>е данных </a:t>
-            </a:r>
-            <a:r>
-              <a:rPr lang="ru-RU" sz="2000" b="0" u="none" strike="noStrike">
-                <a:solidFill>
-                  <a:srgbClr val="000000"/>
-                </a:solidFill>
-                <a:effectLst/>
-                <a:uFillTx/>
-                <a:latin typeface="Arial"/>
-              </a:rPr>
-              <a:t>на </a:t>
-            </a:r>
-            <a:r>
-              <a:rPr lang="ru-RU" sz="2000" b="0" u="none" strike="noStrike">
-                <a:solidFill>
-                  <a:srgbClr val="000000"/>
-                </a:solidFill>
-                <a:effectLst/>
-                <a:uFillTx/>
-                <a:latin typeface="Arial"/>
-              </a:rPr>
-              <a:t>Train/Test </a:t>
-            </a:r>
-            <a:r>
-              <a:rPr lang="ru-RU" sz="2000" b="0" u="none" strike="noStrike">
-                <a:solidFill>
-                  <a:srgbClr val="000000"/>
-                </a:solidFill>
-                <a:effectLst/>
-                <a:uFillTx/>
-                <a:latin typeface="Arial"/>
-              </a:rPr>
-              <a:t>(80/20) со </a:t>
-            </a:r>
-            <a:r>
-              <a:rPr lang="ru-RU" sz="2000" b="0" u="none" strike="noStrike">
-                <a:solidFill>
-                  <a:srgbClr val="000000"/>
-                </a:solidFill>
-                <a:effectLst/>
-                <a:uFillTx/>
-                <a:latin typeface="Arial"/>
-              </a:rPr>
-              <a:t>стратифик</a:t>
-            </a:r>
-            <a:r>
-              <a:rPr lang="ru-RU" sz="2000" b="0" u="none" strike="noStrike">
-                <a:solidFill>
-                  <a:srgbClr val="000000"/>
-                </a:solidFill>
-                <a:effectLst/>
-                <a:uFillTx/>
-                <a:latin typeface="Arial"/>
-              </a:rPr>
-              <a:t>ацией по </a:t>
-            </a:r>
-            <a:r>
-              <a:rPr lang="ru-RU" sz="2000" b="0" u="none" strike="noStrike">
-                <a:solidFill>
-                  <a:srgbClr val="000000"/>
-                </a:solidFill>
-                <a:effectLst/>
-                <a:uFillTx/>
-                <a:latin typeface="Arial"/>
-              </a:rPr>
-              <a:t>классам.</a:t>
+              <a:t>- Валидация: Разделение данных на Train/Test (80/20) со стратификацией по классам.</a:t>
             </a:r>
             <a:endParaRPr lang="ru-RU" sz="2000" b="0" u="none" strike="noStrike">
               <a:solidFill>
@@ -7085,8 +5460,8 @@
         </p:nvSpPr>
         <p:spPr>
           <a:xfrm>
-            <a:off x="504000" y="225360"/>
-            <a:ext cx="9071640" cy="947160"/>
+            <a:off x="540000" y="103320"/>
+            <a:ext cx="9071280" cy="1006200"/>
           </a:xfrm>
           <a:prstGeom prst="rect">
             <a:avLst/>
@@ -7119,84 +5494,7 @@
                 <a:uFillTx/>
                 <a:latin typeface="Arial"/>
               </a:rPr>
-              <a:t>Выбор </a:t>
-            </a:r>
-            <a:r>
-              <a:rPr lang="ru-RU" sz="3300" b="0" u="none" strike="noStrike">
-                <a:solidFill>
-                  <a:srgbClr val="000000"/>
-                </a:solidFill>
-                <a:effectLst/>
-                <a:uFillTx/>
-                <a:latin typeface="Arial"/>
-              </a:rPr>
-              <a:t>и </a:t>
-            </a:r>
-            <a:r>
-              <a:rPr lang="ru-RU" sz="3300" b="0" u="none" strike="noStrike">
-                <a:solidFill>
-                  <a:srgbClr val="000000"/>
-                </a:solidFill>
-                <a:effectLst/>
-                <a:uFillTx/>
-                <a:latin typeface="Arial"/>
-              </a:rPr>
-              <a:t>обучен</a:t>
-            </a:r>
-            <a:r>
-              <a:rPr lang="ru-RU" sz="3300" b="0" u="none" strike="noStrike">
-                <a:solidFill>
-                  <a:srgbClr val="000000"/>
-                </a:solidFill>
-                <a:effectLst/>
-                <a:uFillTx/>
-                <a:latin typeface="Arial"/>
-              </a:rPr>
-              <a:t>ие </a:t>
-            </a:r>
-            <a:r>
-              <a:rPr lang="ru-RU" sz="3300" b="0" u="none" strike="noStrike">
-                <a:solidFill>
-                  <a:srgbClr val="000000"/>
-                </a:solidFill>
-                <a:effectLst/>
-                <a:uFillTx/>
-                <a:latin typeface="Arial"/>
-              </a:rPr>
-              <a:t>модел</a:t>
-            </a:r>
-            <a:r>
-              <a:rPr lang="ru-RU" sz="3300" b="0" u="none" strike="noStrike">
-                <a:solidFill>
-                  <a:srgbClr val="000000"/>
-                </a:solidFill>
-                <a:effectLst/>
-                <a:uFillTx/>
-                <a:latin typeface="Arial"/>
-              </a:rPr>
-              <a:t>ей </a:t>
-            </a:r>
-            <a:r>
-              <a:rPr lang="ru-RU" sz="3300" b="0" u="none" strike="noStrike">
-                <a:solidFill>
-                  <a:srgbClr val="000000"/>
-                </a:solidFill>
-                <a:effectLst/>
-                <a:uFillTx/>
-                <a:latin typeface="Arial"/>
-              </a:rPr>
-              <a:t>(Этап </a:t>
-            </a:r>
-            <a:r>
-              <a:rPr lang="ru-RU" sz="3300" b="0" u="none" strike="noStrike">
-                <a:solidFill>
-                  <a:srgbClr val="000000"/>
-                </a:solidFill>
-                <a:effectLst/>
-                <a:uFillTx/>
-                <a:latin typeface="Arial"/>
-              </a:rPr>
-              <a:t>3)</a:t>
+              <a:t>Эволюция моделей и подбор параметров (Этап 3)</a:t>
             </a:r>
             <a:endParaRPr lang="ru-RU" sz="3300" b="0" u="none" strike="noStrike">
               <a:solidFill>
@@ -7222,7 +5520,7 @@
         <p:spPr>
           <a:xfrm>
             <a:off x="504000" y="1326600"/>
-            <a:ext cx="9071640" cy="3533400"/>
+            <a:ext cx="9071280" cy="3533040"/>
           </a:xfrm>
           <a:prstGeom prst="rect">
             <a:avLst/>
@@ -7234,7 +5532,7 @@
         </p:spPr>
         <p:txBody>
           <a:bodyPr lIns="0" tIns="0" rIns="0" bIns="0" anchor="t">
-            <a:normAutofit fontScale="85000" lnSpcReduction="9999"/>
+            <a:normAutofit fontScale="92500" lnSpcReduction="9999"/>
           </a:bodyPr>
           <a:p>
             <a:pPr indent="0" algn="l">
@@ -7252,7 +5550,7 @@
                 <a:uFillTx/>
                 <a:latin typeface="Arial"/>
               </a:rPr>
-              <a:t>Для исследования взаимосвязей протестирована эволюция из 3-х архитектур:</a:t>
+              <a:t>Протестировано три концептуальных подхода:</a:t>
             </a:r>
             <a:endParaRPr lang="ru-RU" sz="2400" b="0" u="none" strike="noStrike">
               <a:solidFill>
@@ -7264,16 +5562,11 @@
             </a:endParaRPr>
           </a:p>
           <a:p>
-            <a:pPr indent="-324000" algn="l">
+            <a:pPr indent="0" algn="l">
               <a:spcBef>
                 <a:spcPts val="1060"/>
               </a:spcBef>
-              <a:buClr>
-                <a:srgbClr val="000000"/>
-              </a:buClr>
-              <a:buSzPct val="45000"/>
-              <a:buFont typeface="Wingdings" charset="2"/>
-              <a:buChar char=""/>
+              <a:buNone/>
             </a:pPr>
             <a:r>
               <a:rPr lang="ru-RU" sz="2400" b="0" u="none" strike="noStrike">
@@ -7284,7 +5577,7 @@
                 <a:uFillTx/>
                 <a:latin typeface="Arial"/>
               </a:rPr>
-              <a:t>1. Logistic Regression (Baseline): Классический линейный алгоритм, используемый как прозрачная базовая точка отсчета.</a:t>
+              <a:t> 1.  Logistic Regression: Линейный Baseline. Простой, интерпретируемый, но не способный улавливать сложные нелинейные паттерны.</a:t>
             </a:r>
             <a:endParaRPr lang="ru-RU" sz="2400" b="0" u="none" strike="noStrike">
               <a:solidFill>
@@ -7296,16 +5589,11 @@
             </a:endParaRPr>
           </a:p>
           <a:p>
-            <a:pPr indent="-324000" algn="l">
+            <a:pPr indent="0" algn="l">
               <a:spcBef>
                 <a:spcPts val="1060"/>
               </a:spcBef>
-              <a:buClr>
-                <a:srgbClr val="000000"/>
-              </a:buClr>
-              <a:buSzPct val="45000"/>
-              <a:buFont typeface="Wingdings" charset="2"/>
-              <a:buChar char=""/>
+              <a:buNone/>
             </a:pPr>
             <a:r>
               <a:rPr lang="ru-RU" sz="2400" b="0" u="none" strike="noStrike">
@@ -7316,7 +5604,7 @@
                 <a:uFillTx/>
                 <a:latin typeface="Arial"/>
               </a:rPr>
-              <a:t>2. Random Forest Classifier: Сложный ансамбль независимых деревьев решений (бэггинг). Параметры (`n_estimators`, `max_depth`, `min_samples_split`) оптимизированы через `GridSearchCV` по F1-метрике.</a:t>
+              <a:t> 2.  Random Forest Classifier: Ансамбль параллельных деревьев (бэггинг). Оптимизирован через `GridSearchCV`.</a:t>
             </a:r>
             <a:endParaRPr lang="ru-RU" sz="2400" b="0" u="none" strike="noStrike">
               <a:solidFill>
@@ -7328,16 +5616,11 @@
             </a:endParaRPr>
           </a:p>
           <a:p>
-            <a:pPr indent="-324000" algn="l">
+            <a:pPr indent="0" algn="l">
               <a:spcBef>
                 <a:spcPts val="1060"/>
               </a:spcBef>
-              <a:buClr>
-                <a:srgbClr val="000000"/>
-              </a:buClr>
-              <a:buSzPct val="45000"/>
-              <a:buFont typeface="Wingdings" charset="2"/>
-              <a:buChar char=""/>
+              <a:buNone/>
             </a:pPr>
             <a:r>
               <a:rPr lang="ru-RU" sz="2400" b="0" u="none" strike="noStrike">
@@ -7348,7 +5631,7 @@
                 <a:uFillTx/>
                 <a:latin typeface="Arial"/>
               </a:rPr>
-              <a:t>3. XGBoost Classifier (Победитель): Продвинутый алгоритм последовательного градиентного бустинга. Проведена кросс-валидация параметров глубины и `learning_rate` с целевым отслеживанием ошибок предыдущих деревьев.</a:t>
+              <a:t> 3.  XGBoost Classifier (Extreme Gradient Boosting): Передовой алгоритм последовательного бустинга. Каждое дерево учится на ошибках (остатках) предыдущих, обеспечивая максимальную подгонку к сложным медицинским взаимосвязям.</a:t>
             </a:r>
             <a:endParaRPr lang="ru-RU" sz="2400" b="0" u="none" strike="noStrike">
               <a:solidFill>
@@ -7403,8 +5686,8 @@
         </p:nvSpPr>
         <p:spPr>
           <a:xfrm>
-            <a:off x="504000" y="225360"/>
-            <a:ext cx="9071640" cy="947160"/>
+            <a:off x="504000" y="225000"/>
+            <a:ext cx="9071280" cy="947520"/>
           </a:xfrm>
           <a:prstGeom prst="rect">
             <a:avLst/>
@@ -7453,13 +5736,13 @@
       <p:sp>
         <p:nvSpPr>
           <p:cNvPr id="40" name=""/>
-          <p:cNvSpPr txBox="1"/>
+          <p:cNvSpPr/>
           <p:nvPr/>
         </p:nvSpPr>
         <p:spPr>
           <a:xfrm>
             <a:off x="540000" y="1172520"/>
-            <a:ext cx="8820000" cy="3490200"/>
+            <a:ext cx="8819640" cy="2834640"/>
           </a:xfrm>
           <a:prstGeom prst="rect">
             <a:avLst/>
@@ -7469,11 +5752,22 @@
             <a:noFill/>
           </a:ln>
         </p:spPr>
+        <p:style>
+          <a:lnRef idx="0"/>
+          <a:fillRef idx="0"/>
+          <a:effectRef idx="0"/>
+          <a:fontRef idx="minor"/>
+        </p:style>
         <p:txBody>
           <a:bodyPr lIns="90000" tIns="45000" rIns="90000" bIns="45000" anchor="t">
             <a:spAutoFit/>
           </a:bodyPr>
           <a:p>
+            <a:pPr>
+              <a:lnSpc>
+                <a:spcPct val="100000"/>
+              </a:lnSpc>
+            </a:pPr>
             <a:r>
               <a:rPr lang="ru-RU" sz="2000" b="0" u="none" strike="noStrike">
                 <a:solidFill>
@@ -7483,7 +5777,7 @@
                 <a:uFillTx/>
                 <a:latin typeface="Arial"/>
               </a:rPr>
-              <a:t>Сводный анализ на отложенной тестовой выборке:</a:t>
+              <a:t>Результаты тестирования на отложенной выборке:</a:t>
             </a:r>
             <a:endParaRPr lang="ru-RU" sz="2000" b="0" u="none" strike="noStrike">
               <a:solidFill>
@@ -7495,6 +5789,22 @@
             </a:endParaRPr>
           </a:p>
           <a:p>
+            <a:pPr>
+              <a:lnSpc>
+                <a:spcPct val="100000"/>
+              </a:lnSpc>
+            </a:pPr>
+            <a:r>
+              <a:rPr lang="ru-RU" sz="2000" b="0" u="none" strike="noStrike">
+                <a:solidFill>
+                  <a:srgbClr val="000000"/>
+                </a:solidFill>
+                <a:effectLst/>
+                <a:uFillTx/>
+                <a:latin typeface="Arial"/>
+              </a:rPr>
+              <a:t>  * Линейный baseline (LR) показала базовое качество (F1 ~ 0.79).</a:t>
+            </a:r>
             <a:endParaRPr lang="ru-RU" sz="2000" b="0" u="none" strike="noStrike">
               <a:solidFill>
                 <a:srgbClr val="000000"/>
@@ -7505,6 +5815,11 @@
             </a:endParaRPr>
           </a:p>
           <a:p>
+            <a:pPr>
+              <a:lnSpc>
+                <a:spcPct val="100000"/>
+              </a:lnSpc>
+            </a:pPr>
             <a:r>
               <a:rPr lang="ru-RU" sz="2000" b="0" u="none" strike="noStrike">
                 <a:solidFill>
@@ -7514,7 +5829,7 @@
                 <a:uFillTx/>
                 <a:latin typeface="Arial"/>
               </a:rPr>
-              <a:t>- Логистическая регрессия: Демонстрирует базовые метрики (F1 ~ 0.81). Обладает высоким количеством пропусков рисков.</a:t>
+              <a:t>  * Случайный лес (RF) хорошо справился с нелинейностью, но уступил лидеру.</a:t>
             </a:r>
             <a:endParaRPr lang="ru-RU" sz="2000" b="0" u="none" strike="noStrike">
               <a:solidFill>
@@ -7526,6 +5841,22 @@
             </a:endParaRPr>
           </a:p>
           <a:p>
+            <a:pPr>
+              <a:lnSpc>
+                <a:spcPct val="100000"/>
+              </a:lnSpc>
+            </a:pPr>
+            <a:r>
+              <a:rPr lang="ru-RU" sz="2000" b="0" u="none" strike="noStrike">
+                <a:solidFill>
+                  <a:srgbClr val="000000"/>
+                </a:solidFill>
+                <a:effectLst/>
+                <a:uFillTx/>
+                <a:latin typeface="Arial"/>
+              </a:rPr>
+              <a:t>  * XGBoost продемонстрировал наивысшую эффективность, обеспечив максимальный показатель Recall (0.9135). Модель успешно выявляет более 91% всех реальных угроз для пациентов.</a:t>
+            </a:r>
             <a:endParaRPr lang="ru-RU" sz="2000" b="0" u="none" strike="noStrike">
               <a:solidFill>
                 <a:srgbClr val="000000"/>
@@ -7536,6 +5867,11 @@
             </a:endParaRPr>
           </a:p>
           <a:p>
+            <a:pPr>
+              <a:lnSpc>
+                <a:spcPct val="100000"/>
+              </a:lnSpc>
+            </a:pPr>
             <a:r>
               <a:rPr lang="ru-RU" sz="2000" b="0" u="none" strike="noStrike">
                 <a:solidFill>
@@ -7545,38 +5881,7 @@
                 <a:uFillTx/>
                 <a:latin typeface="Arial"/>
               </a:rPr>
-              <a:t>- Случайный лес (Оптимизированный): Заметно повышает показатели (F1 ~ 0.87, ROC-AUC ~ 0.91) за счет нелинейных разделений.</a:t>
-            </a:r>
-            <a:endParaRPr lang="ru-RU" sz="2000" b="0" u="none" strike="noStrike">
-              <a:solidFill>
-                <a:srgbClr val="000000"/>
-              </a:solidFill>
-              <a:effectLst/>
-              <a:uFillTx/>
-              <a:latin typeface="Arial"/>
-            </a:endParaRPr>
-          </a:p>
-          <a:p>
-            <a:endParaRPr lang="ru-RU" sz="2000" b="0" u="none" strike="noStrike">
-              <a:solidFill>
-                <a:srgbClr val="000000"/>
-              </a:solidFill>
-              <a:effectLst/>
-              <a:uFillTx/>
-              <a:latin typeface="Arial"/>
-            </a:endParaRPr>
-          </a:p>
-          <a:p>
-            <a:r>
-              <a:rPr lang="ru-RU" sz="2000" b="0" u="none" strike="noStrike">
-                <a:solidFill>
-                  <a:srgbClr val="000000"/>
-                </a:solidFill>
-                <a:effectLst/>
-                <a:uFillTx/>
-                <a:latin typeface="Arial"/>
-              </a:rPr>
-              <a:t>- XGBoost (Оптимизированный): Лидер по всем метрикам (F1 ~ 0.90, ROC-AUC ~ 0.94). Показал наивысший Recall, сводя к минимуму опасные пропуски пациентов из группы риска (визуализировано на models_comparison.png).</a:t>
+              <a:t>  Иллюстрация на слайде: Сводный график трехстороннего сравнения моделей `models_comparison.png`.</a:t>
             </a:r>
             <a:endParaRPr lang="ru-RU" sz="2000" b="0" u="none" strike="noStrike">
               <a:solidFill>
